--- a/docs/research/HQai_Pricing_Director_Review.pptx
+++ b/docs/research/HQai_Pricing_Director_Review.pptx
@@ -4,6 +4,9 @@
   <p:sldMasterIdLst>
     <p:sldMasterId id="2147483648" r:id="rId1"/>
   </p:sldMasterIdLst>
+  <p:notesMasterIdLst>
+    <p:notesMasterId r:id="rId14"/>
+  </p:notesMasterIdLst>
   <p:sldIdLst>
     <p:sldId id="256" r:id="rId2"/>
     <p:sldId id="257" r:id="rId3"/>
@@ -18,10 +21,7 @@
     <p:sldId id="266" r:id="rId12"/>
     <p:sldId id="267" r:id="rId13"/>
   </p:sldIdLst>
-  <p:notesMasterIdLst>
-    <p:notesMasterId r:id="rId14"/>
-  </p:notesMasterIdLst>
-  <p:sldSz cx="9144000" cy="5143500"/>
+  <p:sldSz cx="9144000" cy="5143500" type="screen16x9"/>
   <p:notesSz cx="5143500" cy="9144000"/>
   <p:defaultTextStyle>
     <a:lvl1pPr marL="0" algn="l" defTabSz="914400" rtl="0" eaLnBrk="1" latinLnBrk="0" hangingPunct="1">
@@ -115,6 +115,11 @@
       </a:defRPr>
     </a:lvl9pPr>
   </p:defaultTextStyle>
+  <p:extLst>
+    <p:ext uri="{EFAFB233-063F-42B5-8137-9DF3F51BA10A}">
+      <p15:sldGuideLst xmlns:p15="http://schemas.microsoft.com/office/powerpoint/2012/main"/>
+    </p:ext>
+  </p:extLst>
 </p:presentation>
 </file>
 
@@ -140,234 +145,10 @@
           <a:chExt cx="0" cy="0"/>
         </a:xfrm>
       </p:grpSpPr>
-      <p:sp>
-        <p:nvSpPr>
-          <p:cNvPr id="2" name="Header Placeholder 1"/>
-          <p:cNvSpPr>
-            <a:spLocks noGrp="1"/>
-          </p:cNvSpPr>
-          <p:nvPr>
-            <p:ph type="hdr" sz="quarter"/>
-          </p:nvPr>
-        </p:nvSpPr>
-        <p:spPr>
-          <a:xfrm>
-            <a:off x="0" y="0"/>
-            <a:ext cx="2971800" cy="458788"/>
-          </a:xfrm>
-          <a:prstGeom prst="rect">
-            <a:avLst/>
-          </a:prstGeom>
-        </p:spPr>
-        <p:txBody>
-          <a:bodyPr vert="horz" lIns="91440" tIns="45720" rIns="91440" bIns="45720" rtlCol="0"/>
-          <a:lstStyle>
-            <a:lvl1pPr algn="l">
-              <a:defRPr sz="1200"/>
-            </a:lvl1pPr>
-          </a:lstStyle>
-          <a:p>
-            <a:endParaRPr lang="en-US"/>
-          </a:p>
-        </p:txBody>
-      </p:sp>
-      <p:sp>
-        <p:nvSpPr>
-          <p:cNvPr id="3" name="Date Placeholder 2"/>
-          <p:cNvSpPr>
-            <a:spLocks noGrp="1"/>
-          </p:cNvSpPr>
-          <p:nvPr>
-            <p:ph type="dt" idx="1"/>
-          </p:nvPr>
-        </p:nvSpPr>
-        <p:spPr>
-          <a:xfrm>
-            <a:off x="3884613" y="0"/>
-            <a:ext cx="2971800" cy="458788"/>
-          </a:xfrm>
-          <a:prstGeom prst="rect">
-            <a:avLst/>
-          </a:prstGeom>
-        </p:spPr>
-        <p:txBody>
-          <a:bodyPr vert="horz" lIns="91440" tIns="45720" rIns="91440" bIns="45720" rtlCol="0"/>
-          <a:lstStyle>
-            <a:lvl1pPr algn="r">
-              <a:defRPr sz="1200"/>
-            </a:lvl1pPr>
-          </a:lstStyle>
-          <a:p>
-            <a:fld id="{5282F153-3F37-0F45-9E97-73ACFA13230C}" type="datetimeFigureOut">
-              <a:rPr lang="en-US"/>
-              <a:t>7/23/19</a:t>
-            </a:fld>
-            <a:endParaRPr lang="en-US"/>
-          </a:p>
-        </p:txBody>
-      </p:sp>
-      <p:sp>
-        <p:nvSpPr>
-          <p:cNvPr id="4" name="Slide Image Placeholder 3"/>
-          <p:cNvSpPr>
-            <a:spLocks noGrp="1" noRot="1" noChangeAspect="1"/>
-          </p:cNvSpPr>
-          <p:nvPr>
-            <p:ph type="sldImg" idx="2"/>
-          </p:nvPr>
-        </p:nvSpPr>
-        <p:spPr>
-          <a:xfrm>
-            <a:off x="685800" y="1143000"/>
-            <a:ext cx="5486400" cy="3086100"/>
-          </a:xfrm>
-          <a:prstGeom prst="rect">
-            <a:avLst/>
-          </a:prstGeom>
-          <a:noFill/>
-          <a:ln w="12700">
-            <a:solidFill>
-              <a:prstClr val="black"/>
-            </a:solidFill>
-          </a:ln>
-        </p:spPr>
-        <p:txBody>
-          <a:bodyPr vert="horz" lIns="91440" tIns="45720" rIns="91440" bIns="45720" rtlCol="0" anchor="ctr"/>
-          <a:lstStyle/>
-          <a:p>
-            <a:endParaRPr lang="en-US"/>
-          </a:p>
-        </p:txBody>
-      </p:sp>
-      <p:sp>
-        <p:nvSpPr>
-          <p:cNvPr id="5" name="Notes Placeholder 4"/>
-          <p:cNvSpPr>
-            <a:spLocks noGrp="1"/>
-          </p:cNvSpPr>
-          <p:nvPr>
-            <p:ph type="body" sz="quarter" idx="3"/>
-          </p:nvPr>
-        </p:nvSpPr>
-        <p:spPr>
-          <a:xfrm>
-            <a:off x="685800" y="4400550"/>
-            <a:ext cx="5486400" cy="3600450"/>
-          </a:xfrm>
-          <a:prstGeom prst="rect">
-            <a:avLst/>
-          </a:prstGeom>
-        </p:spPr>
-        <p:txBody>
-          <a:bodyPr vert="horz" lIns="91440" tIns="45720" rIns="91440" bIns="45720" rtlCol="0"/>
-          <a:lstStyle/>
-          <a:p>
-            <a:pPr lvl="0"/>
-            <a:r>
-              <a:rPr lang="en-US"/>
-              <a:t>Click to edit Master text styles</a:t>
-            </a:r>
-          </a:p>
-          <a:p>
-            <a:pPr lvl="1"/>
-            <a:r>
-              <a:rPr lang="en-US"/>
-              <a:t>Second level</a:t>
-            </a:r>
-          </a:p>
-          <a:p>
-            <a:pPr lvl="2"/>
-            <a:r>
-              <a:rPr lang="en-US"/>
-              <a:t>Third level</a:t>
-            </a:r>
-          </a:p>
-          <a:p>
-            <a:pPr lvl="3"/>
-            <a:r>
-              <a:rPr lang="en-US"/>
-              <a:t>Fourth level</a:t>
-            </a:r>
-          </a:p>
-          <a:p>
-            <a:pPr lvl="4"/>
-            <a:r>
-              <a:rPr lang="en-US"/>
-              <a:t>Fifth level</a:t>
-            </a:r>
-          </a:p>
-        </p:txBody>
-      </p:sp>
-      <p:sp>
-        <p:nvSpPr>
-          <p:cNvPr id="6" name="Footer Placeholder 5"/>
-          <p:cNvSpPr>
-            <a:spLocks noGrp="1"/>
-          </p:cNvSpPr>
-          <p:nvPr>
-            <p:ph type="ftr" sz="quarter" idx="4"/>
-          </p:nvPr>
-        </p:nvSpPr>
-        <p:spPr>
-          <a:xfrm>
-            <a:off x="0" y="8685213"/>
-            <a:ext cx="2971800" cy="458787"/>
-          </a:xfrm>
-          <a:prstGeom prst="rect">
-            <a:avLst/>
-          </a:prstGeom>
-        </p:spPr>
-        <p:txBody>
-          <a:bodyPr vert="horz" lIns="91440" tIns="45720" rIns="91440" bIns="45720" rtlCol="0" anchor="b"/>
-          <a:lstStyle>
-            <a:lvl1pPr algn="l">
-              <a:defRPr sz="1200"/>
-            </a:lvl1pPr>
-          </a:lstStyle>
-          <a:p>
-            <a:endParaRPr lang="en-US"/>
-          </a:p>
-        </p:txBody>
-      </p:sp>
-      <p:sp>
-        <p:nvSpPr>
-          <p:cNvPr id="7" name="Slide Number Placeholder 6"/>
-          <p:cNvSpPr>
-            <a:spLocks noGrp="1"/>
-          </p:cNvSpPr>
-          <p:nvPr>
-            <p:ph type="sldNum" sz="quarter" idx="5"/>
-          </p:nvPr>
-        </p:nvSpPr>
-        <p:spPr>
-          <a:xfrm>
-            <a:off x="3884613" y="8685213"/>
-            <a:ext cx="2971800" cy="458787"/>
-          </a:xfrm>
-          <a:prstGeom prst="rect">
-            <a:avLst/>
-          </a:prstGeom>
-        </p:spPr>
-        <p:txBody>
-          <a:bodyPr vert="horz" lIns="91440" tIns="45720" rIns="91440" bIns="45720" rtlCol="0" anchor="b"/>
-          <a:lstStyle>
-            <a:lvl1pPr algn="r">
-              <a:defRPr sz="1200"/>
-            </a:lvl1pPr>
-          </a:lstStyle>
-          <a:p>
-            <a:fld id="{CE5E9CC1-C706-0F49-92D6-E571CC5EEA8F}" type="slidenum">
-              <a:rPr lang="en-US"/>
-              <a:t>‹#›</a:t>
-            </a:fld>
-            <a:endParaRPr lang="en-US"/>
-          </a:p>
-        </p:txBody>
-      </p:sp>
     </p:spTree>
     <p:extLst>
       <p:ext uri="{BB962C8B-B14F-4D97-AF65-F5344CB8AC3E}">
-        <p14:creationId xmlns:p14="http://schemas.microsoft.com/office/powerpoint/2010/main" val="1024086991"/>
+        <p14:creationId xmlns:p14="http://schemas.microsoft.com/office/powerpoint/2010/main" val="349110886"/>
       </p:ext>
     </p:extLst>
   </p:cSld>
@@ -511,10 +292,6 @@
           <a:bodyPr/>
           <a:lstStyle/>
           <a:p>
-            <a:r>
-              <a:rPr lang="en-US" dirty="0"/>
-              <a:t/>
-            </a:r>
             <a:endParaRPr lang="en-US" dirty="0"/>
           </a:p>
         </p:txBody>
@@ -599,10 +376,6 @@
           <a:bodyPr/>
           <a:lstStyle/>
           <a:p>
-            <a:r>
-              <a:rPr lang="en-US" dirty="0"/>
-              <a:t/>
-            </a:r>
             <a:endParaRPr lang="en-US" dirty="0"/>
           </a:p>
         </p:txBody>
@@ -687,10 +460,6 @@
           <a:bodyPr/>
           <a:lstStyle/>
           <a:p>
-            <a:r>
-              <a:rPr lang="en-US" dirty="0"/>
-              <a:t/>
-            </a:r>
             <a:endParaRPr lang="en-US" dirty="0"/>
           </a:p>
         </p:txBody>
@@ -775,10 +544,6 @@
           <a:bodyPr/>
           <a:lstStyle/>
           <a:p>
-            <a:r>
-              <a:rPr lang="en-US" dirty="0"/>
-              <a:t/>
-            </a:r>
             <a:endParaRPr lang="en-US" dirty="0"/>
           </a:p>
         </p:txBody>
@@ -863,10 +628,6 @@
           <a:bodyPr/>
           <a:lstStyle/>
           <a:p>
-            <a:r>
-              <a:rPr lang="en-US" dirty="0"/>
-              <a:t/>
-            </a:r>
             <a:endParaRPr lang="en-US" dirty="0"/>
           </a:p>
         </p:txBody>
@@ -951,10 +712,6 @@
           <a:bodyPr/>
           <a:lstStyle/>
           <a:p>
-            <a:r>
-              <a:rPr lang="en-US" dirty="0"/>
-              <a:t/>
-            </a:r>
             <a:endParaRPr lang="en-US" dirty="0"/>
           </a:p>
         </p:txBody>
@@ -1039,10 +796,6 @@
           <a:bodyPr/>
           <a:lstStyle/>
           <a:p>
-            <a:r>
-              <a:rPr lang="en-US" dirty="0"/>
-              <a:t/>
-            </a:r>
             <a:endParaRPr lang="en-US" dirty="0"/>
           </a:p>
         </p:txBody>
@@ -1127,10 +880,6 @@
           <a:bodyPr/>
           <a:lstStyle/>
           <a:p>
-            <a:r>
-              <a:rPr lang="en-US" dirty="0"/>
-              <a:t/>
-            </a:r>
             <a:endParaRPr lang="en-US" dirty="0"/>
           </a:p>
         </p:txBody>
@@ -1215,10 +964,6 @@
           <a:bodyPr/>
           <a:lstStyle/>
           <a:p>
-            <a:r>
-              <a:rPr lang="en-US" dirty="0"/>
-              <a:t/>
-            </a:r>
             <a:endParaRPr lang="en-US" dirty="0"/>
           </a:p>
         </p:txBody>
@@ -1303,10 +1048,6 @@
           <a:bodyPr/>
           <a:lstStyle/>
           <a:p>
-            <a:r>
-              <a:rPr lang="en-US" dirty="0"/>
-              <a:t/>
-            </a:r>
             <a:endParaRPr lang="en-US" dirty="0"/>
           </a:p>
         </p:txBody>
@@ -1391,10 +1132,6 @@
           <a:bodyPr/>
           <a:lstStyle/>
           <a:p>
-            <a:r>
-              <a:rPr lang="en-US" dirty="0"/>
-              <a:t/>
-            </a:r>
             <a:endParaRPr lang="en-US" dirty="0"/>
           </a:p>
         </p:txBody>
@@ -1479,10 +1216,6 @@
           <a:bodyPr/>
           <a:lstStyle/>
           <a:p>
-            <a:r>
-              <a:rPr lang="en-US" dirty="0"/>
-              <a:t/>
-            </a:r>
             <a:endParaRPr lang="en-US" dirty="0"/>
           </a:p>
         </p:txBody>
@@ -1556,6 +1289,11 @@
 <file path=ppt/slideMasters/slideMaster1.xml><?xml version="1.0" encoding="utf-8"?>
 <p:sldMaster xmlns:a="http://schemas.openxmlformats.org/drawingml/2006/main" xmlns:r="http://schemas.openxmlformats.org/officeDocument/2006/relationships" xmlns:p="http://schemas.openxmlformats.org/presentationml/2006/main">
   <p:cSld>
+    <p:bg>
+      <p:bgRef idx="1001">
+        <a:schemeClr val="bg1"/>
+      </p:bgRef>
+    </p:bg>
     <p:spTree>
       <p:nvGrpSpPr>
         <p:cNvPr id="1" name=""/>
@@ -1838,6 +1576,7 @@
         <a:solidFill>
           <a:srgbClr val="FFFFFF"/>
         </a:solidFill>
+        <a:effectLst/>
       </p:bgPr>
     </p:bg>
     <p:spTree>
@@ -1873,6 +1612,13 @@
           </a:solidFill>
           <a:ln/>
         </p:spPr>
+        <p:txBody>
+          <a:bodyPr/>
+          <a:lstStyle/>
+          <a:p>
+            <a:endParaRPr lang="en-AU"/>
+          </a:p>
+        </p:txBody>
       </p:sp>
       <p:sp>
         <p:nvSpPr>
@@ -1895,11 +1641,11 @@
           <a:bodyPr wrap="square" lIns="0" tIns="0" rIns="0" bIns="0" rtlCol="0" anchor="ctr"/>
           <a:lstStyle/>
           <a:p>
-            <a:pPr algn="l" indent="0" marL="0">
-              <a:buNone/>
-            </a:pPr>
-            <a:r>
-              <a:rPr lang="en-US" sz="2200" b="1" spc="100" kern="0" dirty="0">
+            <a:pPr marL="0" indent="0" algn="l">
+              <a:buNone/>
+            </a:pPr>
+            <a:r>
+              <a:rPr lang="en-US" sz="2200" b="1" kern="0" spc="100" dirty="0">
                 <a:solidFill>
                   <a:srgbClr val="111111"/>
                 </a:solidFill>
@@ -1934,11 +1680,11 @@
           <a:bodyPr wrap="square" lIns="0" tIns="0" rIns="0" bIns="0" rtlCol="0" anchor="ctr"/>
           <a:lstStyle/>
           <a:p>
-            <a:pPr algn="l" indent="0" marL="0">
-              <a:buNone/>
-            </a:pPr>
-            <a:r>
-              <a:rPr lang="en-US" sz="1000" spc="100" kern="0" dirty="0">
+            <a:pPr marL="0" indent="0" algn="l">
+              <a:buNone/>
+            </a:pPr>
+            <a:r>
+              <a:rPr lang="en-US" sz="1000" kern="0" spc="100" dirty="0">
                 <a:solidFill>
                   <a:srgbClr val="9A9A99"/>
                 </a:solidFill>
@@ -1973,7 +1719,7 @@
           <a:bodyPr wrap="square" lIns="0" tIns="0" rIns="0" bIns="0" rtlCol="0" anchor="ctr"/>
           <a:lstStyle/>
           <a:p>
-            <a:pPr algn="l" indent="0" marL="0">
+            <a:pPr marL="0" indent="0" algn="l">
               <a:buNone/>
             </a:pPr>
             <a:r>
@@ -2012,7 +1758,7 @@
           <a:bodyPr wrap="square" lIns="0" tIns="0" rIns="0" bIns="0" rtlCol="0" anchor="ctr"/>
           <a:lstStyle/>
           <a:p>
-            <a:pPr algn="l" indent="0" marL="0">
+            <a:pPr marL="0" indent="0" algn="l">
               <a:buNone/>
             </a:pPr>
             <a:r>
@@ -2051,7 +1797,7 @@
           <a:bodyPr wrap="square" lIns="0" tIns="0" rIns="0" bIns="0" rtlCol="0" anchor="t"/>
           <a:lstStyle/>
           <a:p>
-            <a:pPr algn="l" indent="0" marL="0">
+            <a:pPr marL="0" indent="0" algn="l">
               <a:spcAft>
                 <a:spcPts val="400"/>
               </a:spcAft>
@@ -2093,11 +1839,11 @@
           <a:bodyPr wrap="square" lIns="0" tIns="0" rIns="0" bIns="0" rtlCol="0" anchor="ctr"/>
           <a:lstStyle/>
           <a:p>
-            <a:pPr algn="l" indent="0" marL="0">
-              <a:buNone/>
-            </a:pPr>
-            <a:r>
-              <a:rPr lang="en-US" sz="1000" spc="100" kern="0" dirty="0">
+            <a:pPr marL="0" indent="0" algn="l">
+              <a:buNone/>
+            </a:pPr>
+            <a:r>
+              <a:rPr lang="en-US" sz="1000" kern="0" spc="100" dirty="0">
                 <a:solidFill>
                   <a:srgbClr val="9A9A99"/>
                 </a:solidFill>
@@ -2132,7 +1878,7 @@
           <a:bodyPr wrap="square" lIns="0" tIns="0" rIns="0" bIns="0" rtlCol="0" anchor="ctr"/>
           <a:lstStyle/>
           <a:p>
-            <a:pPr algn="l" indent="0" marL="0">
+            <a:pPr marL="0" indent="0" algn="l">
               <a:buNone/>
             </a:pPr>
             <a:r>
@@ -2171,11 +1917,11 @@
           <a:bodyPr wrap="square" lIns="0" tIns="0" rIns="0" bIns="0" rtlCol="0" anchor="ctr"/>
           <a:lstStyle/>
           <a:p>
-            <a:pPr algn="l" indent="0" marL="0">
-              <a:buNone/>
-            </a:pPr>
-            <a:r>
-              <a:rPr lang="en-US" sz="1100" spc="100" kern="0" dirty="0">
+            <a:pPr marL="0" indent="0" algn="l">
+              <a:buNone/>
+            </a:pPr>
+            <a:r>
+              <a:rPr lang="en-US" sz="1100" kern="0" spc="100" dirty="0">
                 <a:solidFill>
                   <a:srgbClr val="FFFFFF"/>
                 </a:solidFill>
@@ -2205,6 +1951,7 @@
         <a:solidFill>
           <a:srgbClr val="FFFFFF"/>
         </a:solidFill>
+        <a:effectLst/>
       </p:bgPr>
     </p:bg>
     <p:spTree>
@@ -2240,6 +1987,13 @@
           </a:solidFill>
           <a:ln/>
         </p:spPr>
+        <p:txBody>
+          <a:bodyPr/>
+          <a:lstStyle/>
+          <a:p>
+            <a:endParaRPr lang="en-AU"/>
+          </a:p>
+        </p:txBody>
       </p:sp>
       <p:sp>
         <p:nvSpPr>
@@ -2262,11 +2016,11 @@
           <a:bodyPr wrap="square" lIns="0" tIns="0" rIns="0" bIns="0" rtlCol="0" anchor="ctr"/>
           <a:lstStyle/>
           <a:p>
-            <a:pPr algn="l" indent="0" marL="0">
-              <a:buNone/>
-            </a:pPr>
-            <a:r>
-              <a:rPr lang="en-US" sz="1000" b="1" spc="200" kern="0" dirty="0">
+            <a:pPr marL="0" indent="0" algn="l">
+              <a:buNone/>
+            </a:pPr>
+            <a:r>
+              <a:rPr lang="en-US" sz="1000" b="1" kern="0" spc="200" dirty="0">
                 <a:solidFill>
                   <a:srgbClr val="D97757"/>
                 </a:solidFill>
@@ -2301,7 +2055,7 @@
           <a:bodyPr wrap="square" lIns="0" tIns="0" rIns="0" bIns="0" rtlCol="0" anchor="ctr"/>
           <a:lstStyle/>
           <a:p>
-            <a:pPr algn="l" indent="0" marL="0">
+            <a:pPr marL="0" indent="0" algn="l">
               <a:buNone/>
             </a:pPr>
             <a:r>
@@ -2341,6 +2095,13 @@
             <a:prstDash val="solid"/>
           </a:ln>
         </p:spPr>
+        <p:txBody>
+          <a:bodyPr/>
+          <a:lstStyle/>
+          <a:p>
+            <a:endParaRPr lang="en-AU"/>
+          </a:p>
+        </p:txBody>
       </p:sp>
       <p:sp>
         <p:nvSpPr>
@@ -2363,11 +2124,11 @@
           <a:bodyPr wrap="square" lIns="0" tIns="0" rIns="0" bIns="0" rtlCol="0" anchor="ctr"/>
           <a:lstStyle/>
           <a:p>
-            <a:pPr algn="l" indent="0" marL="0">
-              <a:buNone/>
-            </a:pPr>
-            <a:r>
-              <a:rPr lang="en-US" sz="1100" b="1" spc="200" kern="0" dirty="0">
+            <a:pPr marL="0" indent="0" algn="l">
+              <a:buNone/>
+            </a:pPr>
+            <a:r>
+              <a:rPr lang="en-US" sz="1100" b="1" kern="0" spc="200" dirty="0">
                 <a:solidFill>
                   <a:srgbClr val="D97757"/>
                 </a:solidFill>
@@ -2397,16 +2158,34 @@
         </p:nvGraphicFramePr>
         <p:xfrm>
           <a:off x="457200" y="1874520"/>
-          <a:ext cx="4114800" cy="914400"/>
+          <a:ext cx="4114800" cy="1828800"/>
         </p:xfrm>
         <a:graphic>
           <a:graphicData uri="http://schemas.openxmlformats.org/drawingml/2006/table">
             <a:tbl>
               <a:tblPr/>
               <a:tblGrid>
-                <a:gridCol w="1828800"/>
-                <a:gridCol w="640080"/>
-                <a:gridCol w="1645920"/>
+                <a:gridCol w="1828800">
+                  <a:extLst>
+                    <a:ext uri="{9D8B030D-6E8A-4147-A177-3AD203B41FA5}">
+                      <a16:colId xmlns:a16="http://schemas.microsoft.com/office/drawing/2014/main" val="20000"/>
+                    </a:ext>
+                  </a:extLst>
+                </a:gridCol>
+                <a:gridCol w="640080">
+                  <a:extLst>
+                    <a:ext uri="{9D8B030D-6E8A-4147-A177-3AD203B41FA5}">
+                      <a16:colId xmlns:a16="http://schemas.microsoft.com/office/drawing/2014/main" val="20001"/>
+                    </a:ext>
+                  </a:extLst>
+                </a:gridCol>
+                <a:gridCol w="1645920">
+                  <a:extLst>
+                    <a:ext uri="{9D8B030D-6E8A-4147-A177-3AD203B41FA5}">
+                      <a16:colId xmlns:a16="http://schemas.microsoft.com/office/drawing/2014/main" val="20002"/>
+                    </a:ext>
+                  </a:extLst>
+                </a:gridCol>
               </a:tblGrid>
               <a:tr h="365760">
                 <a:tc>
@@ -2414,7 +2193,7 @@
                     <a:bodyPr/>
                     <a:lstStyle/>
                     <a:p>
-                      <a:pPr indent="0" marL="0">
+                      <a:pPr marL="0" indent="0">
                         <a:buNone/>
                       </a:pPr>
                       <a:r>
@@ -2435,7 +2214,7 @@
                       </a:endParaRPr>
                     </a:p>
                   </a:txBody>
-                  <a:tcPr marL="91440" marR="91440" marT="45720" marB="45720">
+                  <a:tcPr>
                     <a:lnL w="6350" cap="flat" cmpd="sng" algn="ctr">
                       <a:solidFill>
                         <a:srgbClr val="E6E5E0"/>
@@ -2482,7 +2261,7 @@
                     <a:bodyPr/>
                     <a:lstStyle/>
                     <a:p>
-                      <a:pPr algn="ctr" indent="0" marL="0">
+                      <a:pPr marL="0" indent="0" algn="ctr">
                         <a:buNone/>
                       </a:pPr>
                       <a:r>
@@ -2503,7 +2282,7 @@
                       </a:endParaRPr>
                     </a:p>
                   </a:txBody>
-                  <a:tcPr marL="91440" marR="91440" marT="45720" marB="45720">
+                  <a:tcPr>
                     <a:lnL w="6350" cap="flat" cmpd="sng" algn="ctr">
                       <a:solidFill>
                         <a:srgbClr val="E6E5E0"/>
@@ -2550,7 +2329,7 @@
                     <a:bodyPr/>
                     <a:lstStyle/>
                     <a:p>
-                      <a:pPr algn="ctr" indent="0" marL="0">
+                      <a:pPr marL="0" indent="0" algn="ctr">
                         <a:buNone/>
                       </a:pPr>
                       <a:r>
@@ -2571,7 +2350,7 @@
                       </a:endParaRPr>
                     </a:p>
                   </a:txBody>
-                  <a:tcPr marL="91440" marR="91440" marT="45720" marB="45720">
+                  <a:tcPr>
                     <a:lnL w="6350" cap="flat" cmpd="sng" algn="ctr">
                       <a:solidFill>
                         <a:srgbClr val="E6E5E0"/>
@@ -2613,6 +2392,11 @@
                     </a:solidFill>
                   </a:tcPr>
                 </a:tc>
+                <a:extLst>
+                  <a:ext uri="{0D108BD9-81ED-4DB2-BD59-A6C34878D82A}">
+                    <a16:rowId xmlns:a16="http://schemas.microsoft.com/office/drawing/2014/main" val="10000"/>
+                  </a:ext>
+                </a:extLst>
               </a:tr>
               <a:tr h="365760">
                 <a:tc>
@@ -2620,7 +2404,7 @@
                     <a:bodyPr/>
                     <a:lstStyle/>
                     <a:p>
-                      <a:pPr indent="0" marL="0">
+                      <a:pPr marL="0" indent="0">
                         <a:buNone/>
                       </a:pPr>
                       <a:r>
@@ -2641,7 +2425,7 @@
                       </a:endParaRPr>
                     </a:p>
                   </a:txBody>
-                  <a:tcPr marL="91440" marR="91440" marT="45720" marB="45720">
+                  <a:tcPr>
                     <a:lnL w="6350" cap="flat" cmpd="sng" algn="ctr">
                       <a:solidFill>
                         <a:srgbClr val="E6E5E0"/>
@@ -2685,7 +2469,7 @@
                     <a:bodyPr/>
                     <a:lstStyle/>
                     <a:p>
-                      <a:pPr algn="ctr" indent="0" marL="0">
+                      <a:pPr marL="0" indent="0" algn="ctr">
                         <a:buNone/>
                       </a:pPr>
                       <a:r>
@@ -2706,7 +2490,7 @@
                       </a:endParaRPr>
                     </a:p>
                   </a:txBody>
-                  <a:tcPr marL="91440" marR="91440" marT="45720" marB="45720">
+                  <a:tcPr>
                     <a:lnL w="6350" cap="flat" cmpd="sng" algn="ctr">
                       <a:solidFill>
                         <a:srgbClr val="E6E5E0"/>
@@ -2750,7 +2534,7 @@
                     <a:bodyPr/>
                     <a:lstStyle/>
                     <a:p>
-                      <a:pPr algn="ctr" indent="0" marL="0">
+                      <a:pPr marL="0" indent="0" algn="ctr">
                         <a:buNone/>
                       </a:pPr>
                       <a:r>
@@ -2771,7 +2555,7 @@
                       </a:endParaRPr>
                     </a:p>
                   </a:txBody>
-                  <a:tcPr marL="91440" marR="91440" marT="45720" marB="45720">
+                  <a:tcPr>
                     <a:lnL w="6350" cap="flat" cmpd="sng" algn="ctr">
                       <a:solidFill>
                         <a:srgbClr val="E6E5E0"/>
@@ -2810,6 +2594,11 @@
                     </a:lnB>
                   </a:tcPr>
                 </a:tc>
+                <a:extLst>
+                  <a:ext uri="{0D108BD9-81ED-4DB2-BD59-A6C34878D82A}">
+                    <a16:rowId xmlns:a16="http://schemas.microsoft.com/office/drawing/2014/main" val="10001"/>
+                  </a:ext>
+                </a:extLst>
               </a:tr>
               <a:tr h="365760">
                 <a:tc>
@@ -2817,7 +2606,7 @@
                     <a:bodyPr/>
                     <a:lstStyle/>
                     <a:p>
-                      <a:pPr indent="0" marL="0">
+                      <a:pPr marL="0" indent="0">
                         <a:buNone/>
                       </a:pPr>
                       <a:r>
@@ -2838,7 +2627,7 @@
                       </a:endParaRPr>
                     </a:p>
                   </a:txBody>
-                  <a:tcPr marL="91440" marR="91440" marT="45720" marB="45720">
+                  <a:tcPr>
                     <a:lnL w="6350" cap="flat" cmpd="sng" algn="ctr">
                       <a:solidFill>
                         <a:srgbClr val="E6E5E0"/>
@@ -2882,7 +2671,7 @@
                     <a:bodyPr/>
                     <a:lstStyle/>
                     <a:p>
-                      <a:pPr algn="ctr" indent="0" marL="0">
+                      <a:pPr marL="0" indent="0" algn="ctr">
                         <a:buNone/>
                       </a:pPr>
                       <a:r>
@@ -2903,7 +2692,7 @@
                       </a:endParaRPr>
                     </a:p>
                   </a:txBody>
-                  <a:tcPr marL="91440" marR="91440" marT="45720" marB="45720">
+                  <a:tcPr>
                     <a:lnL w="6350" cap="flat" cmpd="sng" algn="ctr">
                       <a:solidFill>
                         <a:srgbClr val="E6E5E0"/>
@@ -2947,7 +2736,7 @@
                     <a:bodyPr/>
                     <a:lstStyle/>
                     <a:p>
-                      <a:pPr algn="ctr" indent="0" marL="0">
+                      <a:pPr marL="0" indent="0" algn="ctr">
                         <a:buNone/>
                       </a:pPr>
                       <a:r>
@@ -2968,7 +2757,7 @@
                       </a:endParaRPr>
                     </a:p>
                   </a:txBody>
-                  <a:tcPr marL="91440" marR="91440" marT="45720" marB="45720">
+                  <a:tcPr>
                     <a:lnL w="6350" cap="flat" cmpd="sng" algn="ctr">
                       <a:solidFill>
                         <a:srgbClr val="E6E5E0"/>
@@ -3007,6 +2796,11 @@
                     </a:lnB>
                   </a:tcPr>
                 </a:tc>
+                <a:extLst>
+                  <a:ext uri="{0D108BD9-81ED-4DB2-BD59-A6C34878D82A}">
+                    <a16:rowId xmlns:a16="http://schemas.microsoft.com/office/drawing/2014/main" val="10002"/>
+                  </a:ext>
+                </a:extLst>
               </a:tr>
               <a:tr h="365760">
                 <a:tc>
@@ -3014,7 +2808,7 @@
                     <a:bodyPr/>
                     <a:lstStyle/>
                     <a:p>
-                      <a:pPr indent="0" marL="0">
+                      <a:pPr marL="0" indent="0">
                         <a:buNone/>
                       </a:pPr>
                       <a:r>
@@ -3035,7 +2829,7 @@
                       </a:endParaRPr>
                     </a:p>
                   </a:txBody>
-                  <a:tcPr marL="91440" marR="91440" marT="45720" marB="45720">
+                  <a:tcPr>
                     <a:lnL w="6350" cap="flat" cmpd="sng" algn="ctr">
                       <a:solidFill>
                         <a:srgbClr val="E6E5E0"/>
@@ -3079,7 +2873,7 @@
                     <a:bodyPr/>
                     <a:lstStyle/>
                     <a:p>
-                      <a:pPr algn="ctr" indent="0" marL="0">
+                      <a:pPr marL="0" indent="0" algn="ctr">
                         <a:buNone/>
                       </a:pPr>
                       <a:r>
@@ -3100,7 +2894,7 @@
                       </a:endParaRPr>
                     </a:p>
                   </a:txBody>
-                  <a:tcPr marL="91440" marR="91440" marT="45720" marB="45720">
+                  <a:tcPr>
                     <a:lnL w="6350" cap="flat" cmpd="sng" algn="ctr">
                       <a:solidFill>
                         <a:srgbClr val="E6E5E0"/>
@@ -3144,7 +2938,7 @@
                     <a:bodyPr/>
                     <a:lstStyle/>
                     <a:p>
-                      <a:pPr algn="ctr" indent="0" marL="0">
+                      <a:pPr marL="0" indent="0" algn="ctr">
                         <a:buNone/>
                       </a:pPr>
                       <a:r>
@@ -3165,7 +2959,7 @@
                       </a:endParaRPr>
                     </a:p>
                   </a:txBody>
-                  <a:tcPr marL="91440" marR="91440" marT="45720" marB="45720">
+                  <a:tcPr>
                     <a:lnL w="6350" cap="flat" cmpd="sng" algn="ctr">
                       <a:solidFill>
                         <a:srgbClr val="E6E5E0"/>
@@ -3204,6 +2998,11 @@
                     </a:lnB>
                   </a:tcPr>
                 </a:tc>
+                <a:extLst>
+                  <a:ext uri="{0D108BD9-81ED-4DB2-BD59-A6C34878D82A}">
+                    <a16:rowId xmlns:a16="http://schemas.microsoft.com/office/drawing/2014/main" val="10003"/>
+                  </a:ext>
+                </a:extLst>
               </a:tr>
               <a:tr h="365760">
                 <a:tc>
@@ -3211,7 +3010,7 @@
                     <a:bodyPr/>
                     <a:lstStyle/>
                     <a:p>
-                      <a:pPr indent="0" marL="0">
+                      <a:pPr marL="0" indent="0">
                         <a:buNone/>
                       </a:pPr>
                       <a:r>
@@ -3232,7 +3031,7 @@
                       </a:endParaRPr>
                     </a:p>
                   </a:txBody>
-                  <a:tcPr marL="91440" marR="91440" marT="45720" marB="45720">
+                  <a:tcPr>
                     <a:lnL w="6350" cap="flat" cmpd="sng" algn="ctr">
                       <a:solidFill>
                         <a:srgbClr val="E6E5E0"/>
@@ -3276,7 +3075,7 @@
                     <a:bodyPr/>
                     <a:lstStyle/>
                     <a:p>
-                      <a:pPr indent="0" marL="0">
+                      <a:pPr marL="0" indent="0">
                         <a:buNone/>
                       </a:pPr>
                       <a:endParaRPr lang="en-US" sz="1000" dirty="0">
@@ -3286,7 +3085,7 @@
                       </a:endParaRPr>
                     </a:p>
                   </a:txBody>
-                  <a:tcPr marL="91440" marR="91440" marT="45720" marB="45720">
+                  <a:tcPr>
                     <a:lnL w="6350" cap="flat" cmpd="sng" algn="ctr">
                       <a:solidFill>
                         <a:srgbClr val="E6E5E0"/>
@@ -3333,7 +3132,7 @@
                     <a:bodyPr/>
                     <a:lstStyle/>
                     <a:p>
-                      <a:pPr algn="ctr" indent="0" marL="0">
+                      <a:pPr marL="0" indent="0" algn="ctr">
                         <a:buNone/>
                       </a:pPr>
                       <a:r>
@@ -3354,7 +3153,7 @@
                       </a:endParaRPr>
                     </a:p>
                   </a:txBody>
-                  <a:tcPr marL="91440" marR="91440" marT="45720" marB="45720">
+                  <a:tcPr>
                     <a:lnL w="6350" cap="flat" cmpd="sng" algn="ctr">
                       <a:solidFill>
                         <a:srgbClr val="E6E5E0"/>
@@ -3393,6 +3192,11 @@
                     </a:lnB>
                   </a:tcPr>
                 </a:tc>
+                <a:extLst>
+                  <a:ext uri="{0D108BD9-81ED-4DB2-BD59-A6C34878D82A}">
+                    <a16:rowId xmlns:a16="http://schemas.microsoft.com/office/drawing/2014/main" val="10004"/>
+                  </a:ext>
+                </a:extLst>
               </a:tr>
             </a:tbl>
           </a:graphicData>
@@ -3419,11 +3223,11 @@
           <a:bodyPr wrap="square" lIns="0" tIns="0" rIns="0" bIns="0" rtlCol="0" anchor="ctr"/>
           <a:lstStyle/>
           <a:p>
-            <a:pPr algn="l" indent="0" marL="0">
-              <a:buNone/>
-            </a:pPr>
-            <a:r>
-              <a:rPr lang="en-US" sz="1100" b="1" spc="200" kern="0" dirty="0">
+            <a:pPr marL="0" indent="0" algn="l">
+              <a:buNone/>
+            </a:pPr>
+            <a:r>
+              <a:rPr lang="en-US" sz="1100" b="1" kern="0" spc="200" dirty="0">
                 <a:solidFill>
                   <a:srgbClr val="D97757"/>
                 </a:solidFill>
@@ -3456,6 +3260,13 @@
           </a:solidFill>
           <a:ln/>
         </p:spPr>
+        <p:txBody>
+          <a:bodyPr/>
+          <a:lstStyle/>
+          <a:p>
+            <a:endParaRPr lang="en-AU"/>
+          </a:p>
+        </p:txBody>
       </p:sp>
       <p:sp>
         <p:nvSpPr>
@@ -3478,7 +3289,7 @@
           <a:bodyPr wrap="square" lIns="0" tIns="0" rIns="0" bIns="0" rtlCol="0" anchor="ctr"/>
           <a:lstStyle/>
           <a:p>
-            <a:pPr algn="ctr" indent="0" marL="0">
+            <a:pPr marL="0" indent="0" algn="ctr">
               <a:buNone/>
             </a:pPr>
             <a:r>
@@ -3498,7 +3309,7 @@
       </p:sp>
       <p:sp>
         <p:nvSpPr>
-          <p:cNvPr id="11" name="Text 8"/>
+          <p:cNvPr id="7" name="Text 8"/>
           <p:cNvSpPr/>
           <p:nvPr/>
         </p:nvSpPr>
@@ -3517,7 +3328,7 @@
           <a:bodyPr wrap="square" lIns="0" tIns="0" rIns="0" bIns="0" rtlCol="0" anchor="ctr"/>
           <a:lstStyle/>
           <a:p>
-            <a:pPr algn="l" indent="0" marL="0">
+            <a:pPr marL="0" indent="0" algn="l">
               <a:buNone/>
             </a:pPr>
             <a:r>
@@ -3556,7 +3367,7 @@
           <a:bodyPr wrap="square" lIns="0" tIns="0" rIns="0" bIns="0" rtlCol="0" anchor="ctr"/>
           <a:lstStyle/>
           <a:p>
-            <a:pPr algn="l" indent="0" marL="0">
+            <a:pPr marL="0" indent="0" algn="l">
               <a:buNone/>
             </a:pPr>
             <a:r>
@@ -3593,6 +3404,13 @@
           </a:solidFill>
           <a:ln/>
         </p:spPr>
+        <p:txBody>
+          <a:bodyPr/>
+          <a:lstStyle/>
+          <a:p>
+            <a:endParaRPr lang="en-AU"/>
+          </a:p>
+        </p:txBody>
       </p:sp>
       <p:sp>
         <p:nvSpPr>
@@ -3615,7 +3433,7 @@
           <a:bodyPr wrap="square" lIns="0" tIns="0" rIns="0" bIns="0" rtlCol="0" anchor="ctr"/>
           <a:lstStyle/>
           <a:p>
-            <a:pPr algn="ctr" indent="0" marL="0">
+            <a:pPr marL="0" indent="0" algn="ctr">
               <a:buNone/>
             </a:pPr>
             <a:r>
@@ -3654,7 +3472,7 @@
           <a:bodyPr wrap="square" lIns="0" tIns="0" rIns="0" bIns="0" rtlCol="0" anchor="ctr"/>
           <a:lstStyle/>
           <a:p>
-            <a:pPr algn="l" indent="0" marL="0">
+            <a:pPr marL="0" indent="0" algn="l">
               <a:buNone/>
             </a:pPr>
             <a:r>
@@ -3693,7 +3511,7 @@
           <a:bodyPr wrap="square" lIns="0" tIns="0" rIns="0" bIns="0" rtlCol="0" anchor="ctr"/>
           <a:lstStyle/>
           <a:p>
-            <a:pPr algn="l" indent="0" marL="0">
+            <a:pPr marL="0" indent="0" algn="l">
               <a:buNone/>
             </a:pPr>
             <a:r>
@@ -3730,6 +3548,13 @@
           </a:solidFill>
           <a:ln/>
         </p:spPr>
+        <p:txBody>
+          <a:bodyPr/>
+          <a:lstStyle/>
+          <a:p>
+            <a:endParaRPr lang="en-AU"/>
+          </a:p>
+        </p:txBody>
       </p:sp>
       <p:sp>
         <p:nvSpPr>
@@ -3752,7 +3577,7 @@
           <a:bodyPr wrap="square" lIns="0" tIns="0" rIns="0" bIns="0" rtlCol="0" anchor="ctr"/>
           <a:lstStyle/>
           <a:p>
-            <a:pPr algn="ctr" indent="0" marL="0">
+            <a:pPr marL="0" indent="0" algn="ctr">
               <a:buNone/>
             </a:pPr>
             <a:r>
@@ -3791,7 +3616,7 @@
           <a:bodyPr wrap="square" lIns="0" tIns="0" rIns="0" bIns="0" rtlCol="0" anchor="ctr"/>
           <a:lstStyle/>
           <a:p>
-            <a:pPr algn="l" indent="0" marL="0">
+            <a:pPr marL="0" indent="0" algn="l">
               <a:buNone/>
             </a:pPr>
             <a:r>
@@ -3830,7 +3655,7 @@
           <a:bodyPr wrap="square" lIns="0" tIns="0" rIns="0" bIns="0" rtlCol="0" anchor="ctr"/>
           <a:lstStyle/>
           <a:p>
-            <a:pPr algn="l" indent="0" marL="0">
+            <a:pPr marL="0" indent="0" algn="l">
               <a:buNone/>
             </a:pPr>
             <a:r>
@@ -3867,6 +3692,13 @@
           </a:solidFill>
           <a:ln/>
         </p:spPr>
+        <p:txBody>
+          <a:bodyPr/>
+          <a:lstStyle/>
+          <a:p>
+            <a:endParaRPr lang="en-AU"/>
+          </a:p>
+        </p:txBody>
       </p:sp>
       <p:sp>
         <p:nvSpPr>
@@ -3889,7 +3721,7 @@
           <a:bodyPr wrap="square" lIns="0" tIns="0" rIns="0" bIns="0" rtlCol="0" anchor="ctr"/>
           <a:lstStyle/>
           <a:p>
-            <a:pPr algn="ctr" indent="0" marL="0">
+            <a:pPr marL="0" indent="0" algn="ctr">
               <a:buNone/>
             </a:pPr>
             <a:r>
@@ -3928,7 +3760,7 @@
           <a:bodyPr wrap="square" lIns="0" tIns="0" rIns="0" bIns="0" rtlCol="0" anchor="ctr"/>
           <a:lstStyle/>
           <a:p>
-            <a:pPr algn="l" indent="0" marL="0">
+            <a:pPr marL="0" indent="0" algn="l">
               <a:buNone/>
             </a:pPr>
             <a:r>
@@ -3967,7 +3799,7 @@
           <a:bodyPr wrap="square" lIns="0" tIns="0" rIns="0" bIns="0" rtlCol="0" anchor="ctr"/>
           <a:lstStyle/>
           <a:p>
-            <a:pPr algn="l" indent="0" marL="0">
+            <a:pPr marL="0" indent="0" algn="l">
               <a:buNone/>
             </a:pPr>
             <a:r>
@@ -4004,6 +3836,13 @@
           </a:solidFill>
           <a:ln/>
         </p:spPr>
+        <p:txBody>
+          <a:bodyPr/>
+          <a:lstStyle/>
+          <a:p>
+            <a:endParaRPr lang="en-AU"/>
+          </a:p>
+        </p:txBody>
       </p:sp>
       <p:sp>
         <p:nvSpPr>
@@ -4026,7 +3865,7 @@
           <a:bodyPr wrap="square" lIns="0" tIns="0" rIns="0" bIns="0" rtlCol="0" anchor="ctr"/>
           <a:lstStyle/>
           <a:p>
-            <a:pPr algn="ctr" indent="0" marL="0">
+            <a:pPr marL="0" indent="0" algn="ctr">
               <a:buNone/>
             </a:pPr>
             <a:r>
@@ -4065,7 +3904,7 @@
           <a:bodyPr wrap="square" lIns="0" tIns="0" rIns="0" bIns="0" rtlCol="0" anchor="ctr"/>
           <a:lstStyle/>
           <a:p>
-            <a:pPr algn="l" indent="0" marL="0">
+            <a:pPr marL="0" indent="0" algn="l">
               <a:buNone/>
             </a:pPr>
             <a:r>
@@ -4104,7 +3943,7 @@
           <a:bodyPr wrap="square" lIns="0" tIns="0" rIns="0" bIns="0" rtlCol="0" anchor="ctr"/>
           <a:lstStyle/>
           <a:p>
-            <a:pPr algn="l" indent="0" marL="0">
+            <a:pPr marL="0" indent="0" algn="l">
               <a:buNone/>
             </a:pPr>
             <a:r>
@@ -4141,6 +3980,13 @@
           </a:solidFill>
           <a:ln/>
         </p:spPr>
+        <p:txBody>
+          <a:bodyPr/>
+          <a:lstStyle/>
+          <a:p>
+            <a:endParaRPr lang="en-AU"/>
+          </a:p>
+        </p:txBody>
       </p:sp>
       <p:sp>
         <p:nvSpPr>
@@ -4163,7 +4009,7 @@
           <a:bodyPr wrap="square" lIns="0" tIns="0" rIns="0" bIns="0" rtlCol="0" anchor="ctr"/>
           <a:lstStyle/>
           <a:p>
-            <a:pPr algn="l" indent="0" marL="0">
+            <a:pPr marL="0" indent="0" algn="l">
               <a:buNone/>
             </a:pPr>
             <a:r>
@@ -4202,7 +4048,7 @@
           <a:bodyPr wrap="square" lIns="0" tIns="0" rIns="0" bIns="0" rtlCol="0" anchor="ctr"/>
           <a:lstStyle/>
           <a:p>
-            <a:pPr algn="r" indent="0" marL="0">
+            <a:pPr marL="0" indent="0" algn="r">
               <a:buNone/>
             </a:pPr>
             <a:r>
@@ -4236,6 +4082,7 @@
         <a:solidFill>
           <a:srgbClr val="FFFFFF"/>
         </a:solidFill>
+        <a:effectLst/>
       </p:bgPr>
     </p:bg>
     <p:spTree>
@@ -4271,6 +4118,13 @@
           </a:solidFill>
           <a:ln/>
         </p:spPr>
+        <p:txBody>
+          <a:bodyPr/>
+          <a:lstStyle/>
+          <a:p>
+            <a:endParaRPr lang="en-AU"/>
+          </a:p>
+        </p:txBody>
       </p:sp>
       <p:sp>
         <p:nvSpPr>
@@ -4293,11 +4147,11 @@
           <a:bodyPr wrap="square" lIns="0" tIns="0" rIns="0" bIns="0" rtlCol="0" anchor="ctr"/>
           <a:lstStyle/>
           <a:p>
-            <a:pPr algn="l" indent="0" marL="0">
-              <a:buNone/>
-            </a:pPr>
-            <a:r>
-              <a:rPr lang="en-US" sz="1000" b="1" spc="200" kern="0" dirty="0">
+            <a:pPr marL="0" indent="0" algn="l">
+              <a:buNone/>
+            </a:pPr>
+            <a:r>
+              <a:rPr lang="en-US" sz="1000" b="1" kern="0" spc="200" dirty="0">
                 <a:solidFill>
                   <a:srgbClr val="D97757"/>
                 </a:solidFill>
@@ -4332,7 +4186,7 @@
           <a:bodyPr wrap="square" lIns="0" tIns="0" rIns="0" bIns="0" rtlCol="0" anchor="ctr"/>
           <a:lstStyle/>
           <a:p>
-            <a:pPr algn="l" indent="0" marL="0">
+            <a:pPr marL="0" indent="0" algn="l">
               <a:buNone/>
             </a:pPr>
             <a:r>
@@ -4372,6 +4226,13 @@
             <a:prstDash val="solid"/>
           </a:ln>
         </p:spPr>
+        <p:txBody>
+          <a:bodyPr/>
+          <a:lstStyle/>
+          <a:p>
+            <a:endParaRPr lang="en-AU"/>
+          </a:p>
+        </p:txBody>
       </p:sp>
       <p:sp>
         <p:nvSpPr>
@@ -4397,6 +4258,13 @@
             <a:prstDash val="solid"/>
           </a:ln>
         </p:spPr>
+        <p:txBody>
+          <a:bodyPr/>
+          <a:lstStyle/>
+          <a:p>
+            <a:endParaRPr lang="en-AU"/>
+          </a:p>
+        </p:txBody>
       </p:sp>
       <p:sp>
         <p:nvSpPr>
@@ -4419,11 +4287,11 @@
           <a:bodyPr wrap="square" lIns="0" tIns="0" rIns="0" bIns="0" rtlCol="0" anchor="ctr"/>
           <a:lstStyle/>
           <a:p>
-            <a:pPr algn="l" indent="0" marL="0">
-              <a:buNone/>
-            </a:pPr>
-            <a:r>
-              <a:rPr lang="en-US" sz="1400" b="1" spc="200" kern="0" dirty="0">
+            <a:pPr marL="0" indent="0" algn="l">
+              <a:buNone/>
+            </a:pPr>
+            <a:r>
+              <a:rPr lang="en-US" sz="1400" b="1" kern="0" spc="200" dirty="0">
                 <a:solidFill>
                   <a:srgbClr val="D97757"/>
                 </a:solidFill>
@@ -4458,7 +4326,7 @@
           <a:bodyPr wrap="square" lIns="0" tIns="0" rIns="0" bIns="0" rtlCol="0" anchor="ctr"/>
           <a:lstStyle/>
           <a:p>
-            <a:pPr algn="l" indent="0" marL="0">
+            <a:pPr marL="0" indent="0" algn="l">
               <a:buNone/>
             </a:pPr>
             <a:r>
@@ -4497,7 +4365,7 @@
           <a:bodyPr wrap="square" lIns="0" tIns="0" rIns="0" bIns="0" rtlCol="0" anchor="ctr"/>
           <a:lstStyle/>
           <a:p>
-            <a:pPr algn="l" indent="0" marL="0">
+            <a:pPr marL="0" indent="0" algn="l">
               <a:buNone/>
             </a:pPr>
             <a:r>
@@ -4536,11 +4404,11 @@
           <a:bodyPr wrap="square" lIns="0" tIns="0" rIns="0" bIns="0" rtlCol="0" anchor="ctr"/>
           <a:lstStyle/>
           <a:p>
-            <a:pPr algn="l" indent="0" marL="0">
-              <a:buNone/>
-            </a:pPr>
-            <a:r>
-              <a:rPr lang="en-US" sz="1000" spc="100" kern="0" dirty="0">
+            <a:pPr marL="0" indent="0" algn="l">
+              <a:buNone/>
+            </a:pPr>
+            <a:r>
+              <a:rPr lang="en-US" sz="1000" kern="0" spc="100" dirty="0">
                 <a:solidFill>
                   <a:srgbClr val="9A9A99"/>
                 </a:solidFill>
@@ -4575,7 +4443,7 @@
           <a:bodyPr wrap="square" lIns="0" tIns="0" rIns="0" bIns="0" rtlCol="0" anchor="ctr"/>
           <a:lstStyle/>
           <a:p>
-            <a:pPr algn="l" indent="0" marL="0">
+            <a:pPr marL="0" indent="0" algn="l">
               <a:buNone/>
             </a:pPr>
             <a:r>
@@ -4614,7 +4482,7 @@
           <a:bodyPr wrap="square" lIns="0" tIns="0" rIns="0" bIns="0" rtlCol="0" anchor="ctr"/>
           <a:lstStyle/>
           <a:p>
-            <a:pPr algn="l" indent="0" marL="0">
+            <a:pPr marL="0" indent="0" algn="l">
               <a:buNone/>
             </a:pPr>
             <a:r>
@@ -4653,7 +4521,7 @@
           <a:bodyPr wrap="square" lIns="0" tIns="0" rIns="0" bIns="0" rtlCol="0" anchor="t"/>
           <a:lstStyle/>
           <a:p>
-            <a:pPr algn="l" indent="0" marL="0">
+            <a:pPr marL="0" indent="0" algn="l">
               <a:buNone/>
             </a:pPr>
             <a:r>
@@ -4692,7 +4560,7 @@
           <a:bodyPr wrap="square" lIns="0" tIns="0" rIns="0" bIns="0" rtlCol="0" anchor="t"/>
           <a:lstStyle/>
           <a:p>
-            <a:pPr algn="l" indent="0" marL="0">
+            <a:pPr marL="0" indent="0" algn="l">
               <a:buNone/>
             </a:pPr>
             <a:r>
@@ -4734,6 +4602,13 @@
             <a:prstDash val="solid"/>
           </a:ln>
         </p:spPr>
+        <p:txBody>
+          <a:bodyPr/>
+          <a:lstStyle/>
+          <a:p>
+            <a:endParaRPr lang="en-AU"/>
+          </a:p>
+        </p:txBody>
       </p:sp>
       <p:sp>
         <p:nvSpPr>
@@ -4756,11 +4631,11 @@
           <a:bodyPr wrap="square" lIns="0" tIns="0" rIns="0" bIns="0" rtlCol="0" anchor="ctr"/>
           <a:lstStyle/>
           <a:p>
-            <a:pPr algn="l" indent="0" marL="0">
-              <a:buNone/>
-            </a:pPr>
-            <a:r>
-              <a:rPr lang="en-US" sz="1400" b="1" spc="200" kern="0" dirty="0">
+            <a:pPr marL="0" indent="0" algn="l">
+              <a:buNone/>
+            </a:pPr>
+            <a:r>
+              <a:rPr lang="en-US" sz="1400" b="1" kern="0" spc="200" dirty="0">
                 <a:solidFill>
                   <a:srgbClr val="D97757"/>
                 </a:solidFill>
@@ -4795,7 +4670,7 @@
           <a:bodyPr wrap="square" lIns="0" tIns="0" rIns="0" bIns="0" rtlCol="0" anchor="ctr"/>
           <a:lstStyle/>
           <a:p>
-            <a:pPr algn="l" indent="0" marL="0">
+            <a:pPr marL="0" indent="0" algn="l">
               <a:buNone/>
             </a:pPr>
             <a:r>
@@ -4834,7 +4709,7 @@
           <a:bodyPr wrap="square" lIns="0" tIns="0" rIns="0" bIns="0" rtlCol="0" anchor="ctr"/>
           <a:lstStyle/>
           <a:p>
-            <a:pPr algn="l" indent="0" marL="0">
+            <a:pPr marL="0" indent="0" algn="l">
               <a:buNone/>
             </a:pPr>
             <a:r>
@@ -4873,11 +4748,11 @@
           <a:bodyPr wrap="square" lIns="0" tIns="0" rIns="0" bIns="0" rtlCol="0" anchor="ctr"/>
           <a:lstStyle/>
           <a:p>
-            <a:pPr algn="l" indent="0" marL="0">
-              <a:buNone/>
-            </a:pPr>
-            <a:r>
-              <a:rPr lang="en-US" sz="1000" spc="100" kern="0" dirty="0">
+            <a:pPr marL="0" indent="0" algn="l">
+              <a:buNone/>
+            </a:pPr>
+            <a:r>
+              <a:rPr lang="en-US" sz="1000" kern="0" spc="100" dirty="0">
                 <a:solidFill>
                   <a:srgbClr val="9A9A99"/>
                 </a:solidFill>
@@ -4912,7 +4787,7 @@
           <a:bodyPr wrap="square" lIns="0" tIns="0" rIns="0" bIns="0" rtlCol="0" anchor="ctr"/>
           <a:lstStyle/>
           <a:p>
-            <a:pPr algn="l" indent="0" marL="0">
+            <a:pPr marL="0" indent="0" algn="l">
               <a:buNone/>
             </a:pPr>
             <a:r>
@@ -4951,7 +4826,7 @@
           <a:bodyPr wrap="square" lIns="0" tIns="0" rIns="0" bIns="0" rtlCol="0" anchor="ctr"/>
           <a:lstStyle/>
           <a:p>
-            <a:pPr algn="l" indent="0" marL="0">
+            <a:pPr marL="0" indent="0" algn="l">
               <a:buNone/>
             </a:pPr>
             <a:r>
@@ -4990,7 +4865,7 @@
           <a:bodyPr wrap="square" lIns="0" tIns="0" rIns="0" bIns="0" rtlCol="0" anchor="t"/>
           <a:lstStyle/>
           <a:p>
-            <a:pPr algn="l" indent="0" marL="0">
+            <a:pPr marL="0" indent="0" algn="l">
               <a:buNone/>
             </a:pPr>
             <a:r>
@@ -5029,7 +4904,7 @@
           <a:bodyPr wrap="square" lIns="0" tIns="0" rIns="0" bIns="0" rtlCol="0" anchor="t"/>
           <a:lstStyle/>
           <a:p>
-            <a:pPr algn="l" indent="0" marL="0">
+            <a:pPr marL="0" indent="0" algn="l">
               <a:buNone/>
             </a:pPr>
             <a:r>
@@ -5068,7 +4943,7 @@
           <a:bodyPr wrap="square" lIns="0" tIns="0" rIns="0" bIns="0" rtlCol="0" anchor="ctr"/>
           <a:lstStyle/>
           <a:p>
-            <a:pPr algn="l" indent="0" marL="0">
+            <a:pPr marL="0" indent="0" algn="l">
               <a:buNone/>
             </a:pPr>
             <a:r>
@@ -5105,6 +4980,13 @@
           </a:solidFill>
           <a:ln/>
         </p:spPr>
+        <p:txBody>
+          <a:bodyPr/>
+          <a:lstStyle/>
+          <a:p>
+            <a:endParaRPr lang="en-AU"/>
+          </a:p>
+        </p:txBody>
       </p:sp>
       <p:sp>
         <p:nvSpPr>
@@ -5127,7 +5009,7 @@
           <a:bodyPr wrap="square" lIns="0" tIns="0" rIns="0" bIns="0" rtlCol="0" anchor="ctr"/>
           <a:lstStyle/>
           <a:p>
-            <a:pPr algn="l" indent="0" marL="0">
+            <a:pPr marL="0" indent="0" algn="l">
               <a:buNone/>
             </a:pPr>
             <a:r>
@@ -5166,7 +5048,7 @@
           <a:bodyPr wrap="square" lIns="0" tIns="0" rIns="0" bIns="0" rtlCol="0" anchor="ctr"/>
           <a:lstStyle/>
           <a:p>
-            <a:pPr algn="r" indent="0" marL="0">
+            <a:pPr marL="0" indent="0" algn="r">
               <a:buNone/>
             </a:pPr>
             <a:r>
@@ -5200,6 +5082,7 @@
         <a:solidFill>
           <a:srgbClr val="FFFFFF"/>
         </a:solidFill>
+        <a:effectLst/>
       </p:bgPr>
     </p:bg>
     <p:spTree>
@@ -5235,6 +5118,13 @@
           </a:solidFill>
           <a:ln/>
         </p:spPr>
+        <p:txBody>
+          <a:bodyPr/>
+          <a:lstStyle/>
+          <a:p>
+            <a:endParaRPr lang="en-AU"/>
+          </a:p>
+        </p:txBody>
       </p:sp>
       <p:sp>
         <p:nvSpPr>
@@ -5257,11 +5147,11 @@
           <a:bodyPr wrap="square" lIns="0" tIns="0" rIns="0" bIns="0" rtlCol="0" anchor="ctr"/>
           <a:lstStyle/>
           <a:p>
-            <a:pPr algn="l" indent="0" marL="0">
-              <a:buNone/>
-            </a:pPr>
-            <a:r>
-              <a:rPr lang="en-US" sz="1000" b="1" spc="200" kern="0" dirty="0">
+            <a:pPr marL="0" indent="0" algn="l">
+              <a:buNone/>
+            </a:pPr>
+            <a:r>
+              <a:rPr lang="en-US" sz="1000" b="1" kern="0" spc="200" dirty="0">
                 <a:solidFill>
                   <a:srgbClr val="D97757"/>
                 </a:solidFill>
@@ -5296,7 +5186,7 @@
           <a:bodyPr wrap="square" lIns="0" tIns="0" rIns="0" bIns="0" rtlCol="0" anchor="ctr"/>
           <a:lstStyle/>
           <a:p>
-            <a:pPr algn="l" indent="0" marL="0">
+            <a:pPr marL="0" indent="0" algn="l">
               <a:buNone/>
             </a:pPr>
             <a:r>
@@ -5336,6 +5226,13 @@
             <a:prstDash val="solid"/>
           </a:ln>
         </p:spPr>
+        <p:txBody>
+          <a:bodyPr/>
+          <a:lstStyle/>
+          <a:p>
+            <a:endParaRPr lang="en-AU"/>
+          </a:p>
+        </p:txBody>
       </p:sp>
       <p:sp>
         <p:nvSpPr>
@@ -5356,6 +5253,13 @@
           </a:solidFill>
           <a:ln/>
         </p:spPr>
+        <p:txBody>
+          <a:bodyPr/>
+          <a:lstStyle/>
+          <a:p>
+            <a:endParaRPr lang="en-AU"/>
+          </a:p>
+        </p:txBody>
       </p:sp>
       <p:sp>
         <p:nvSpPr>
@@ -5378,7 +5282,7 @@
           <a:bodyPr wrap="square" lIns="0" tIns="0" rIns="0" bIns="0" rtlCol="0" anchor="ctr"/>
           <a:lstStyle/>
           <a:p>
-            <a:pPr algn="ctr" indent="0" marL="0">
+            <a:pPr marL="0" indent="0" algn="ctr">
               <a:buNone/>
             </a:pPr>
             <a:r>
@@ -5417,7 +5321,7 @@
           <a:bodyPr wrap="square" lIns="0" tIns="0" rIns="0" bIns="0" rtlCol="0" anchor="ctr"/>
           <a:lstStyle/>
           <a:p>
-            <a:pPr algn="l" indent="0" marL="0">
+            <a:pPr marL="0" indent="0" algn="l">
               <a:buNone/>
             </a:pPr>
             <a:r>
@@ -5456,7 +5360,7 @@
           <a:bodyPr wrap="square" lIns="0" tIns="0" rIns="0" bIns="0" rtlCol="0" anchor="t"/>
           <a:lstStyle/>
           <a:p>
-            <a:pPr algn="l" indent="0" marL="0">
+            <a:pPr marL="0" indent="0" algn="l">
               <a:buNone/>
             </a:pPr>
             <a:r>
@@ -5493,6 +5397,13 @@
           </a:solidFill>
           <a:ln/>
         </p:spPr>
+        <p:txBody>
+          <a:bodyPr/>
+          <a:lstStyle/>
+          <a:p>
+            <a:endParaRPr lang="en-AU"/>
+          </a:p>
+        </p:txBody>
       </p:sp>
       <p:sp>
         <p:nvSpPr>
@@ -5515,7 +5426,7 @@
           <a:bodyPr wrap="square" lIns="0" tIns="0" rIns="0" bIns="0" rtlCol="0" anchor="ctr"/>
           <a:lstStyle/>
           <a:p>
-            <a:pPr algn="ctr" indent="0" marL="0">
+            <a:pPr marL="0" indent="0" algn="ctr">
               <a:buNone/>
             </a:pPr>
             <a:r>
@@ -5554,7 +5465,7 @@
           <a:bodyPr wrap="square" lIns="0" tIns="0" rIns="0" bIns="0" rtlCol="0" anchor="ctr"/>
           <a:lstStyle/>
           <a:p>
-            <a:pPr algn="l" indent="0" marL="0">
+            <a:pPr marL="0" indent="0" algn="l">
               <a:buNone/>
             </a:pPr>
             <a:r>
@@ -5593,7 +5504,7 @@
           <a:bodyPr wrap="square" lIns="0" tIns="0" rIns="0" bIns="0" rtlCol="0" anchor="t"/>
           <a:lstStyle/>
           <a:p>
-            <a:pPr algn="l" indent="0" marL="0">
+            <a:pPr marL="0" indent="0" algn="l">
               <a:buNone/>
             </a:pPr>
             <a:r>
@@ -5630,6 +5541,13 @@
           </a:solidFill>
           <a:ln/>
         </p:spPr>
+        <p:txBody>
+          <a:bodyPr/>
+          <a:lstStyle/>
+          <a:p>
+            <a:endParaRPr lang="en-AU"/>
+          </a:p>
+        </p:txBody>
       </p:sp>
       <p:sp>
         <p:nvSpPr>
@@ -5652,7 +5570,7 @@
           <a:bodyPr wrap="square" lIns="0" tIns="0" rIns="0" bIns="0" rtlCol="0" anchor="ctr"/>
           <a:lstStyle/>
           <a:p>
-            <a:pPr algn="ctr" indent="0" marL="0">
+            <a:pPr marL="0" indent="0" algn="ctr">
               <a:buNone/>
             </a:pPr>
             <a:r>
@@ -5691,7 +5609,7 @@
           <a:bodyPr wrap="square" lIns="0" tIns="0" rIns="0" bIns="0" rtlCol="0" anchor="ctr"/>
           <a:lstStyle/>
           <a:p>
-            <a:pPr algn="l" indent="0" marL="0">
+            <a:pPr marL="0" indent="0" algn="l">
               <a:buNone/>
             </a:pPr>
             <a:r>
@@ -5730,7 +5648,7 @@
           <a:bodyPr wrap="square" lIns="0" tIns="0" rIns="0" bIns="0" rtlCol="0" anchor="t"/>
           <a:lstStyle/>
           <a:p>
-            <a:pPr algn="l" indent="0" marL="0">
+            <a:pPr marL="0" indent="0" algn="l">
               <a:buNone/>
             </a:pPr>
             <a:r>
@@ -5767,6 +5685,13 @@
           </a:solidFill>
           <a:ln/>
         </p:spPr>
+        <p:txBody>
+          <a:bodyPr/>
+          <a:lstStyle/>
+          <a:p>
+            <a:endParaRPr lang="en-AU"/>
+          </a:p>
+        </p:txBody>
       </p:sp>
       <p:sp>
         <p:nvSpPr>
@@ -5789,7 +5714,7 @@
           <a:bodyPr wrap="square" lIns="0" tIns="0" rIns="0" bIns="0" rtlCol="0" anchor="ctr"/>
           <a:lstStyle/>
           <a:p>
-            <a:pPr algn="ctr" indent="0" marL="0">
+            <a:pPr marL="0" indent="0" algn="ctr">
               <a:buNone/>
             </a:pPr>
             <a:r>
@@ -5828,7 +5753,7 @@
           <a:bodyPr wrap="square" lIns="0" tIns="0" rIns="0" bIns="0" rtlCol="0" anchor="ctr"/>
           <a:lstStyle/>
           <a:p>
-            <a:pPr algn="l" indent="0" marL="0">
+            <a:pPr marL="0" indent="0" algn="l">
               <a:buNone/>
             </a:pPr>
             <a:r>
@@ -5867,7 +5792,7 @@
           <a:bodyPr wrap="square" lIns="0" tIns="0" rIns="0" bIns="0" rtlCol="0" anchor="t"/>
           <a:lstStyle/>
           <a:p>
-            <a:pPr algn="l" indent="0" marL="0">
+            <a:pPr marL="0" indent="0" algn="l">
               <a:buNone/>
             </a:pPr>
             <a:r>
@@ -5904,6 +5829,13 @@
           </a:solidFill>
           <a:ln/>
         </p:spPr>
+        <p:txBody>
+          <a:bodyPr/>
+          <a:lstStyle/>
+          <a:p>
+            <a:endParaRPr lang="en-AU"/>
+          </a:p>
+        </p:txBody>
       </p:sp>
       <p:sp>
         <p:nvSpPr>
@@ -5926,7 +5858,7 @@
           <a:bodyPr wrap="square" lIns="0" tIns="0" rIns="0" bIns="0" rtlCol="0" anchor="ctr"/>
           <a:lstStyle/>
           <a:p>
-            <a:pPr algn="ctr" indent="0" marL="0">
+            <a:pPr marL="0" indent="0" algn="ctr">
               <a:buNone/>
             </a:pPr>
             <a:r>
@@ -5965,7 +5897,7 @@
           <a:bodyPr wrap="square" lIns="0" tIns="0" rIns="0" bIns="0" rtlCol="0" anchor="ctr"/>
           <a:lstStyle/>
           <a:p>
-            <a:pPr algn="l" indent="0" marL="0">
+            <a:pPr marL="0" indent="0" algn="l">
               <a:buNone/>
             </a:pPr>
             <a:r>
@@ -6004,7 +5936,7 @@
           <a:bodyPr wrap="square" lIns="0" tIns="0" rIns="0" bIns="0" rtlCol="0" anchor="t"/>
           <a:lstStyle/>
           <a:p>
-            <a:pPr algn="l" indent="0" marL="0">
+            <a:pPr marL="0" indent="0" algn="l">
               <a:buNone/>
             </a:pPr>
             <a:r>
@@ -6041,6 +5973,13 @@
           </a:solidFill>
           <a:ln/>
         </p:spPr>
+        <p:txBody>
+          <a:bodyPr/>
+          <a:lstStyle/>
+          <a:p>
+            <a:endParaRPr lang="en-AU"/>
+          </a:p>
+        </p:txBody>
       </p:sp>
       <p:sp>
         <p:nvSpPr>
@@ -6063,7 +6002,7 @@
           <a:bodyPr wrap="square" lIns="0" tIns="0" rIns="0" bIns="0" rtlCol="0" anchor="ctr"/>
           <a:lstStyle/>
           <a:p>
-            <a:pPr algn="l" indent="0" marL="0">
+            <a:pPr marL="0" indent="0" algn="l">
               <a:buNone/>
             </a:pPr>
             <a:r>
@@ -6102,7 +6041,7 @@
           <a:bodyPr wrap="square" lIns="0" tIns="0" rIns="0" bIns="0" rtlCol="0" anchor="ctr"/>
           <a:lstStyle/>
           <a:p>
-            <a:pPr algn="r" indent="0" marL="0">
+            <a:pPr marL="0" indent="0" algn="r">
               <a:buNone/>
             </a:pPr>
             <a:r>
@@ -6136,6 +6075,7 @@
         <a:solidFill>
           <a:srgbClr val="FFFFFF"/>
         </a:solidFill>
+        <a:effectLst/>
       </p:bgPr>
     </p:bg>
     <p:spTree>
@@ -6171,6 +6111,13 @@
           </a:solidFill>
           <a:ln/>
         </p:spPr>
+        <p:txBody>
+          <a:bodyPr/>
+          <a:lstStyle/>
+          <a:p>
+            <a:endParaRPr lang="en-AU"/>
+          </a:p>
+        </p:txBody>
       </p:sp>
       <p:sp>
         <p:nvSpPr>
@@ -6193,11 +6140,11 @@
           <a:bodyPr wrap="square" lIns="0" tIns="0" rIns="0" bIns="0" rtlCol="0" anchor="ctr"/>
           <a:lstStyle/>
           <a:p>
-            <a:pPr algn="l" indent="0" marL="0">
-              <a:buNone/>
-            </a:pPr>
-            <a:r>
-              <a:rPr lang="en-US" sz="1000" b="1" spc="200" kern="0" dirty="0">
+            <a:pPr marL="0" indent="0" algn="l">
+              <a:buNone/>
+            </a:pPr>
+            <a:r>
+              <a:rPr lang="en-US" sz="1000" b="1" kern="0" spc="200" dirty="0">
                 <a:solidFill>
                   <a:srgbClr val="D97757"/>
                 </a:solidFill>
@@ -6232,7 +6179,7 @@
           <a:bodyPr wrap="square" lIns="0" tIns="0" rIns="0" bIns="0" rtlCol="0" anchor="ctr"/>
           <a:lstStyle/>
           <a:p>
-            <a:pPr algn="l" indent="0" marL="0">
+            <a:pPr marL="0" indent="0" algn="l">
               <a:buNone/>
             </a:pPr>
             <a:r>
@@ -6272,6 +6219,13 @@
             <a:prstDash val="solid"/>
           </a:ln>
         </p:spPr>
+        <p:txBody>
+          <a:bodyPr/>
+          <a:lstStyle/>
+          <a:p>
+            <a:endParaRPr lang="en-AU"/>
+          </a:p>
+        </p:txBody>
       </p:sp>
       <p:sp>
         <p:nvSpPr>
@@ -6297,6 +6251,13 @@
             <a:prstDash val="solid"/>
           </a:ln>
         </p:spPr>
+        <p:txBody>
+          <a:bodyPr/>
+          <a:lstStyle/>
+          <a:p>
+            <a:endParaRPr lang="en-AU"/>
+          </a:p>
+        </p:txBody>
       </p:sp>
       <p:sp>
         <p:nvSpPr>
@@ -6317,6 +6278,13 @@
           </a:solidFill>
           <a:ln/>
         </p:spPr>
+        <p:txBody>
+          <a:bodyPr/>
+          <a:lstStyle/>
+          <a:p>
+            <a:endParaRPr lang="en-AU"/>
+          </a:p>
+        </p:txBody>
       </p:sp>
       <p:sp>
         <p:nvSpPr>
@@ -6339,7 +6307,7 @@
           <a:bodyPr wrap="square" lIns="0" tIns="0" rIns="0" bIns="0" rtlCol="0" anchor="t"/>
           <a:lstStyle/>
           <a:p>
-            <a:pPr algn="l" indent="0" marL="0">
+            <a:pPr marL="0" indent="0" algn="l">
               <a:buNone/>
             </a:pPr>
             <a:r>
@@ -6378,7 +6346,7 @@
           <a:bodyPr wrap="square" lIns="0" tIns="0" rIns="0" bIns="0" rtlCol="0" anchor="t"/>
           <a:lstStyle/>
           <a:p>
-            <a:pPr algn="l" indent="0" marL="0">
+            <a:pPr marL="0" indent="0" algn="l">
               <a:spcAft>
                 <a:spcPts val="400"/>
               </a:spcAft>
@@ -6423,6 +6391,13 @@
             <a:prstDash val="solid"/>
           </a:ln>
         </p:spPr>
+        <p:txBody>
+          <a:bodyPr/>
+          <a:lstStyle/>
+          <a:p>
+            <a:endParaRPr lang="en-AU"/>
+          </a:p>
+        </p:txBody>
       </p:sp>
       <p:sp>
         <p:nvSpPr>
@@ -6443,6 +6418,13 @@
           </a:solidFill>
           <a:ln/>
         </p:spPr>
+        <p:txBody>
+          <a:bodyPr/>
+          <a:lstStyle/>
+          <a:p>
+            <a:endParaRPr lang="en-AU"/>
+          </a:p>
+        </p:txBody>
       </p:sp>
       <p:sp>
         <p:nvSpPr>
@@ -6465,7 +6447,7 @@
           <a:bodyPr wrap="square" lIns="0" tIns="0" rIns="0" bIns="0" rtlCol="0" anchor="t"/>
           <a:lstStyle/>
           <a:p>
-            <a:pPr algn="l" indent="0" marL="0">
+            <a:pPr marL="0" indent="0" algn="l">
               <a:buNone/>
             </a:pPr>
             <a:r>
@@ -6504,7 +6486,7 @@
           <a:bodyPr wrap="square" lIns="0" tIns="0" rIns="0" bIns="0" rtlCol="0" anchor="t"/>
           <a:lstStyle/>
           <a:p>
-            <a:pPr algn="l" indent="0" marL="0">
+            <a:pPr marL="0" indent="0" algn="l">
               <a:spcAft>
                 <a:spcPts val="400"/>
               </a:spcAft>
@@ -6549,6 +6531,13 @@
             <a:prstDash val="solid"/>
           </a:ln>
         </p:spPr>
+        <p:txBody>
+          <a:bodyPr/>
+          <a:lstStyle/>
+          <a:p>
+            <a:endParaRPr lang="en-AU"/>
+          </a:p>
+        </p:txBody>
       </p:sp>
       <p:sp>
         <p:nvSpPr>
@@ -6569,6 +6558,13 @@
           </a:solidFill>
           <a:ln/>
         </p:spPr>
+        <p:txBody>
+          <a:bodyPr/>
+          <a:lstStyle/>
+          <a:p>
+            <a:endParaRPr lang="en-AU"/>
+          </a:p>
+        </p:txBody>
       </p:sp>
       <p:sp>
         <p:nvSpPr>
@@ -6591,7 +6587,7 @@
           <a:bodyPr wrap="square" lIns="0" tIns="0" rIns="0" bIns="0" rtlCol="0" anchor="t"/>
           <a:lstStyle/>
           <a:p>
-            <a:pPr algn="l" indent="0" marL="0">
+            <a:pPr marL="0" indent="0" algn="l">
               <a:buNone/>
             </a:pPr>
             <a:r>
@@ -6630,7 +6626,7 @@
           <a:bodyPr wrap="square" lIns="0" tIns="0" rIns="0" bIns="0" rtlCol="0" anchor="t"/>
           <a:lstStyle/>
           <a:p>
-            <a:pPr algn="l" indent="0" marL="0">
+            <a:pPr marL="0" indent="0" algn="l">
               <a:spcAft>
                 <a:spcPts val="400"/>
               </a:spcAft>
@@ -6670,6 +6666,13 @@
           </a:solidFill>
           <a:ln/>
         </p:spPr>
+        <p:txBody>
+          <a:bodyPr/>
+          <a:lstStyle/>
+          <a:p>
+            <a:endParaRPr lang="en-AU"/>
+          </a:p>
+        </p:txBody>
       </p:sp>
       <p:sp>
         <p:nvSpPr>
@@ -6692,7 +6695,7 @@
           <a:bodyPr wrap="square" lIns="0" tIns="0" rIns="0" bIns="0" rtlCol="0" anchor="ctr"/>
           <a:lstStyle/>
           <a:p>
-            <a:pPr algn="l" indent="0" marL="0">
+            <a:pPr marL="0" indent="0" algn="l">
               <a:buNone/>
             </a:pPr>
             <a:r>
@@ -6731,7 +6734,7 @@
           <a:bodyPr wrap="square" lIns="0" tIns="0" rIns="0" bIns="0" rtlCol="0" anchor="ctr"/>
           <a:lstStyle/>
           <a:p>
-            <a:pPr algn="r" indent="0" marL="0">
+            <a:pPr marL="0" indent="0" algn="r">
               <a:buNone/>
             </a:pPr>
             <a:r>
@@ -6765,6 +6768,7 @@
         <a:solidFill>
           <a:srgbClr val="FFFFFF"/>
         </a:solidFill>
+        <a:effectLst/>
       </p:bgPr>
     </p:bg>
     <p:spTree>
@@ -6800,6 +6804,13 @@
           </a:solidFill>
           <a:ln/>
         </p:spPr>
+        <p:txBody>
+          <a:bodyPr/>
+          <a:lstStyle/>
+          <a:p>
+            <a:endParaRPr lang="en-AU"/>
+          </a:p>
+        </p:txBody>
       </p:sp>
       <p:sp>
         <p:nvSpPr>
@@ -6822,11 +6833,11 @@
           <a:bodyPr wrap="square" lIns="0" tIns="0" rIns="0" bIns="0" rtlCol="0" anchor="ctr"/>
           <a:lstStyle/>
           <a:p>
-            <a:pPr algn="l" indent="0" marL="0">
-              <a:buNone/>
-            </a:pPr>
-            <a:r>
-              <a:rPr lang="en-US" sz="1000" b="1" spc="200" kern="0" dirty="0">
+            <a:pPr marL="0" indent="0" algn="l">
+              <a:buNone/>
+            </a:pPr>
+            <a:r>
+              <a:rPr lang="en-US" sz="1000" b="1" kern="0" spc="200" dirty="0">
                 <a:solidFill>
                   <a:srgbClr val="D97757"/>
                 </a:solidFill>
@@ -6861,7 +6872,7 @@
           <a:bodyPr wrap="square" lIns="0" tIns="0" rIns="0" bIns="0" rtlCol="0" anchor="ctr"/>
           <a:lstStyle/>
           <a:p>
-            <a:pPr algn="l" indent="0" marL="0">
+            <a:pPr marL="0" indent="0" algn="l">
               <a:buNone/>
             </a:pPr>
             <a:r>
@@ -6901,6 +6912,13 @@
             <a:prstDash val="solid"/>
           </a:ln>
         </p:spPr>
+        <p:txBody>
+          <a:bodyPr/>
+          <a:lstStyle/>
+          <a:p>
+            <a:endParaRPr lang="en-AU"/>
+          </a:p>
+        </p:txBody>
       </p:sp>
       <p:sp>
         <p:nvSpPr>
@@ -6926,6 +6944,13 @@
             <a:prstDash val="solid"/>
           </a:ln>
         </p:spPr>
+        <p:txBody>
+          <a:bodyPr/>
+          <a:lstStyle/>
+          <a:p>
+            <a:endParaRPr lang="en-AU"/>
+          </a:p>
+        </p:txBody>
       </p:sp>
       <p:sp>
         <p:nvSpPr>
@@ -6946,6 +6971,13 @@
           </a:solidFill>
           <a:ln/>
         </p:spPr>
+        <p:txBody>
+          <a:bodyPr/>
+          <a:lstStyle/>
+          <a:p>
+            <a:endParaRPr lang="en-AU"/>
+          </a:p>
+        </p:txBody>
       </p:sp>
       <p:sp>
         <p:nvSpPr>
@@ -6968,7 +7000,7 @@
           <a:bodyPr wrap="square" lIns="0" tIns="0" rIns="0" bIns="0" rtlCol="0" anchor="ctr"/>
           <a:lstStyle/>
           <a:p>
-            <a:pPr algn="l" indent="0" marL="0">
+            <a:pPr marL="0" indent="0" algn="l">
               <a:buNone/>
             </a:pPr>
             <a:r>
@@ -7007,7 +7039,7 @@
           <a:bodyPr wrap="square" lIns="0" tIns="0" rIns="0" bIns="0" rtlCol="0" anchor="ctr"/>
           <a:lstStyle/>
           <a:p>
-            <a:pPr algn="l" indent="0" marL="0">
+            <a:pPr marL="0" indent="0" algn="l">
               <a:buNone/>
             </a:pPr>
             <a:r>
@@ -7046,7 +7078,7 @@
           <a:bodyPr wrap="square" lIns="0" tIns="0" rIns="0" bIns="0" rtlCol="0" anchor="ctr"/>
           <a:lstStyle/>
           <a:p>
-            <a:pPr algn="l" indent="0" marL="0">
+            <a:pPr marL="0" indent="0" algn="l">
               <a:buNone/>
             </a:pPr>
             <a:r>
@@ -7088,6 +7120,13 @@
             <a:prstDash val="solid"/>
           </a:ln>
         </p:spPr>
+        <p:txBody>
+          <a:bodyPr/>
+          <a:lstStyle/>
+          <a:p>
+            <a:endParaRPr lang="en-AU"/>
+          </a:p>
+        </p:txBody>
       </p:sp>
       <p:sp>
         <p:nvSpPr>
@@ -7108,6 +7147,13 @@
           </a:solidFill>
           <a:ln/>
         </p:spPr>
+        <p:txBody>
+          <a:bodyPr/>
+          <a:lstStyle/>
+          <a:p>
+            <a:endParaRPr lang="en-AU"/>
+          </a:p>
+        </p:txBody>
       </p:sp>
       <p:sp>
         <p:nvSpPr>
@@ -7130,7 +7176,7 @@
           <a:bodyPr wrap="square" lIns="0" tIns="0" rIns="0" bIns="0" rtlCol="0" anchor="ctr"/>
           <a:lstStyle/>
           <a:p>
-            <a:pPr algn="l" indent="0" marL="0">
+            <a:pPr marL="0" indent="0" algn="l">
               <a:buNone/>
             </a:pPr>
             <a:r>
@@ -7169,7 +7215,7 @@
           <a:bodyPr wrap="square" lIns="0" tIns="0" rIns="0" bIns="0" rtlCol="0" anchor="ctr"/>
           <a:lstStyle/>
           <a:p>
-            <a:pPr algn="l" indent="0" marL="0">
+            <a:pPr marL="0" indent="0" algn="l">
               <a:buNone/>
             </a:pPr>
             <a:r>
@@ -7208,7 +7254,7 @@
           <a:bodyPr wrap="square" lIns="0" tIns="0" rIns="0" bIns="0" rtlCol="0" anchor="ctr"/>
           <a:lstStyle/>
           <a:p>
-            <a:pPr algn="l" indent="0" marL="0">
+            <a:pPr marL="0" indent="0" algn="l">
               <a:buNone/>
             </a:pPr>
             <a:r>
@@ -7250,6 +7296,13 @@
             <a:prstDash val="solid"/>
           </a:ln>
         </p:spPr>
+        <p:txBody>
+          <a:bodyPr/>
+          <a:lstStyle/>
+          <a:p>
+            <a:endParaRPr lang="en-AU"/>
+          </a:p>
+        </p:txBody>
       </p:sp>
       <p:sp>
         <p:nvSpPr>
@@ -7270,6 +7323,13 @@
           </a:solidFill>
           <a:ln/>
         </p:spPr>
+        <p:txBody>
+          <a:bodyPr/>
+          <a:lstStyle/>
+          <a:p>
+            <a:endParaRPr lang="en-AU"/>
+          </a:p>
+        </p:txBody>
       </p:sp>
       <p:sp>
         <p:nvSpPr>
@@ -7292,7 +7352,7 @@
           <a:bodyPr wrap="square" lIns="0" tIns="0" rIns="0" bIns="0" rtlCol="0" anchor="ctr"/>
           <a:lstStyle/>
           <a:p>
-            <a:pPr algn="l" indent="0" marL="0">
+            <a:pPr marL="0" indent="0" algn="l">
               <a:buNone/>
             </a:pPr>
             <a:r>
@@ -7331,7 +7391,7 @@
           <a:bodyPr wrap="square" lIns="0" tIns="0" rIns="0" bIns="0" rtlCol="0" anchor="ctr"/>
           <a:lstStyle/>
           <a:p>
-            <a:pPr algn="l" indent="0" marL="0">
+            <a:pPr marL="0" indent="0" algn="l">
               <a:buNone/>
             </a:pPr>
             <a:r>
@@ -7370,7 +7430,7 @@
           <a:bodyPr wrap="square" lIns="0" tIns="0" rIns="0" bIns="0" rtlCol="0" anchor="ctr"/>
           <a:lstStyle/>
           <a:p>
-            <a:pPr algn="l" indent="0" marL="0">
+            <a:pPr marL="0" indent="0" algn="l">
               <a:buNone/>
             </a:pPr>
             <a:r>
@@ -7412,6 +7472,13 @@
             <a:prstDash val="solid"/>
           </a:ln>
         </p:spPr>
+        <p:txBody>
+          <a:bodyPr/>
+          <a:lstStyle/>
+          <a:p>
+            <a:endParaRPr lang="en-AU"/>
+          </a:p>
+        </p:txBody>
       </p:sp>
       <p:sp>
         <p:nvSpPr>
@@ -7434,7 +7501,7 @@
           <a:bodyPr wrap="square" lIns="0" tIns="0" rIns="0" bIns="0" rtlCol="0" anchor="ctr"/>
           <a:lstStyle/>
           <a:p>
-            <a:pPr algn="l" indent="0" marL="0">
+            <a:pPr marL="0" indent="0" algn="l">
               <a:buNone/>
             </a:pPr>
             <a:r>
@@ -7473,7 +7540,7 @@
           <a:bodyPr wrap="square" lIns="0" tIns="0" rIns="0" bIns="0" rtlCol="0" anchor="ctr"/>
           <a:lstStyle/>
           <a:p>
-            <a:pPr algn="l" indent="0" marL="0">
+            <a:pPr marL="0" indent="0" algn="l">
               <a:buNone/>
             </a:pPr>
             <a:r>
@@ -7512,7 +7579,7 @@
           <a:bodyPr wrap="square" lIns="0" tIns="0" rIns="0" bIns="0" rtlCol="0" anchor="ctr"/>
           <a:lstStyle/>
           <a:p>
-            <a:pPr algn="l" indent="0" marL="0">
+            <a:pPr marL="0" indent="0" algn="l">
               <a:buNone/>
             </a:pPr>
             <a:r>
@@ -7554,6 +7621,13 @@
             <a:prstDash val="solid"/>
           </a:ln>
         </p:spPr>
+        <p:txBody>
+          <a:bodyPr/>
+          <a:lstStyle/>
+          <a:p>
+            <a:endParaRPr lang="en-AU"/>
+          </a:p>
+        </p:txBody>
       </p:sp>
       <p:sp>
         <p:nvSpPr>
@@ -7576,7 +7650,7 @@
           <a:bodyPr wrap="square" lIns="0" tIns="0" rIns="0" bIns="0" rtlCol="0" anchor="ctr"/>
           <a:lstStyle/>
           <a:p>
-            <a:pPr algn="l" indent="0" marL="0">
+            <a:pPr marL="0" indent="0" algn="l">
               <a:buNone/>
             </a:pPr>
             <a:r>
@@ -7615,7 +7689,7 @@
           <a:bodyPr wrap="square" lIns="0" tIns="0" rIns="0" bIns="0" rtlCol="0" anchor="ctr"/>
           <a:lstStyle/>
           <a:p>
-            <a:pPr algn="l" indent="0" marL="0">
+            <a:pPr marL="0" indent="0" algn="l">
               <a:buNone/>
             </a:pPr>
             <a:r>
@@ -7654,7 +7728,7 @@
           <a:bodyPr wrap="square" lIns="0" tIns="0" rIns="0" bIns="0" rtlCol="0" anchor="ctr"/>
           <a:lstStyle/>
           <a:p>
-            <a:pPr algn="l" indent="0" marL="0">
+            <a:pPr marL="0" indent="0" algn="l">
               <a:buNone/>
             </a:pPr>
             <a:r>
@@ -7666,7 +7740,7 @@
                 <a:ea typeface="Calibri" pitchFamily="34" charset="-122"/>
                 <a:cs typeface="Calibri" pitchFamily="34" charset="-120"/>
               </a:rPr>
-              <a:t>3 seats, 500 credits, 1 active recruit role.</a:t>
+              <a:t>2 seats, 500 credits, 1 active recruit role.</a:t>
             </a:r>
             <a:endParaRPr lang="en-US" sz="1000" dirty="0"/>
           </a:p>
@@ -7693,7 +7767,7 @@
           <a:bodyPr wrap="square" lIns="0" tIns="0" rIns="0" bIns="0" rtlCol="0" anchor="ctr"/>
           <a:lstStyle/>
           <a:p>
-            <a:pPr algn="l" indent="0" marL="0">
+            <a:pPr marL="0" indent="0" algn="l">
               <a:buNone/>
             </a:pPr>
             <a:r>
@@ -7730,6 +7804,13 @@
           </a:solidFill>
           <a:ln/>
         </p:spPr>
+        <p:txBody>
+          <a:bodyPr/>
+          <a:lstStyle/>
+          <a:p>
+            <a:endParaRPr lang="en-AU"/>
+          </a:p>
+        </p:txBody>
       </p:sp>
       <p:sp>
         <p:nvSpPr>
@@ -7752,7 +7833,7 @@
           <a:bodyPr wrap="square" lIns="0" tIns="0" rIns="0" bIns="0" rtlCol="0" anchor="ctr"/>
           <a:lstStyle/>
           <a:p>
-            <a:pPr algn="l" indent="0" marL="0">
+            <a:pPr marL="0" indent="0" algn="l">
               <a:buNone/>
             </a:pPr>
             <a:r>
@@ -7791,7 +7872,7 @@
           <a:bodyPr wrap="square" lIns="0" tIns="0" rIns="0" bIns="0" rtlCol="0" anchor="ctr"/>
           <a:lstStyle/>
           <a:p>
-            <a:pPr algn="r" indent="0" marL="0">
+            <a:pPr marL="0" indent="0" algn="r">
               <a:buNone/>
             </a:pPr>
             <a:r>
@@ -7825,6 +7906,7 @@
         <a:solidFill>
           <a:srgbClr val="FFFFFF"/>
         </a:solidFill>
+        <a:effectLst/>
       </p:bgPr>
     </p:bg>
     <p:spTree>
@@ -7860,6 +7942,13 @@
           </a:solidFill>
           <a:ln/>
         </p:spPr>
+        <p:txBody>
+          <a:bodyPr/>
+          <a:lstStyle/>
+          <a:p>
+            <a:endParaRPr lang="en-AU"/>
+          </a:p>
+        </p:txBody>
       </p:sp>
       <p:sp>
         <p:nvSpPr>
@@ -7882,11 +7971,11 @@
           <a:bodyPr wrap="square" lIns="0" tIns="0" rIns="0" bIns="0" rtlCol="0" anchor="ctr"/>
           <a:lstStyle/>
           <a:p>
-            <a:pPr algn="l" indent="0" marL="0">
-              <a:buNone/>
-            </a:pPr>
-            <a:r>
-              <a:rPr lang="en-US" sz="1000" b="1" spc="200" kern="0" dirty="0">
+            <a:pPr marL="0" indent="0" algn="l">
+              <a:buNone/>
+            </a:pPr>
+            <a:r>
+              <a:rPr lang="en-US" sz="1000" b="1" kern="0" spc="200" dirty="0">
                 <a:solidFill>
                   <a:srgbClr val="D97757"/>
                 </a:solidFill>
@@ -7921,7 +8010,7 @@
           <a:bodyPr wrap="square" lIns="0" tIns="0" rIns="0" bIns="0" rtlCol="0" anchor="ctr"/>
           <a:lstStyle/>
           <a:p>
-            <a:pPr algn="l" indent="0" marL="0">
+            <a:pPr marL="0" indent="0" algn="l">
               <a:buNone/>
             </a:pPr>
             <a:r>
@@ -7961,6 +8050,13 @@
             <a:prstDash val="solid"/>
           </a:ln>
         </p:spPr>
+        <p:txBody>
+          <a:bodyPr/>
+          <a:lstStyle/>
+          <a:p>
+            <a:endParaRPr lang="en-AU"/>
+          </a:p>
+        </p:txBody>
       </p:sp>
       <p:sp>
         <p:nvSpPr>
@@ -7986,6 +8082,13 @@
             <a:prstDash val="solid"/>
           </a:ln>
         </p:spPr>
+        <p:txBody>
+          <a:bodyPr/>
+          <a:lstStyle/>
+          <a:p>
+            <a:endParaRPr lang="en-AU"/>
+          </a:p>
+        </p:txBody>
       </p:sp>
       <p:sp>
         <p:nvSpPr>
@@ -8008,7 +8111,7 @@
           <a:bodyPr wrap="square" lIns="0" tIns="0" rIns="0" bIns="0" rtlCol="0" anchor="ctr"/>
           <a:lstStyle/>
           <a:p>
-            <a:pPr algn="l" indent="0" marL="0">
+            <a:pPr marL="0" indent="0" algn="l">
               <a:buNone/>
             </a:pPr>
             <a:r>
@@ -8047,7 +8150,7 @@
           <a:bodyPr wrap="square" lIns="0" tIns="0" rIns="0" bIns="0" rtlCol="0" anchor="ctr"/>
           <a:lstStyle/>
           <a:p>
-            <a:pPr algn="l" indent="0" marL="0">
+            <a:pPr marL="0" indent="0" algn="l">
               <a:buNone/>
             </a:pPr>
             <a:r>
@@ -8086,7 +8189,7 @@
           <a:bodyPr wrap="square" lIns="0" tIns="0" rIns="0" bIns="0" rtlCol="0" anchor="ctr"/>
           <a:lstStyle/>
           <a:p>
-            <a:pPr algn="l" indent="0" marL="0">
+            <a:pPr marL="0" indent="0" algn="l">
               <a:buNone/>
             </a:pPr>
             <a:r>
@@ -8125,7 +8228,7 @@
           <a:bodyPr wrap="square" lIns="0" tIns="0" rIns="0" bIns="0" rtlCol="0" anchor="ctr"/>
           <a:lstStyle/>
           <a:p>
-            <a:pPr algn="l" indent="0" marL="0">
+            <a:pPr marL="0" indent="0" algn="l">
               <a:buNone/>
             </a:pPr>
             <a:r>
@@ -8164,7 +8267,7 @@
           <a:bodyPr wrap="square" lIns="0" tIns="0" rIns="0" bIns="0" rtlCol="0" anchor="ctr"/>
           <a:lstStyle/>
           <a:p>
-            <a:pPr algn="l" indent="0" marL="0">
+            <a:pPr marL="0" indent="0" algn="l">
               <a:buNone/>
             </a:pPr>
             <a:r>
@@ -8203,7 +8306,7 @@
           <a:bodyPr wrap="square" lIns="0" tIns="0" rIns="0" bIns="0" rtlCol="0" anchor="ctr"/>
           <a:lstStyle/>
           <a:p>
-            <a:pPr algn="l" indent="0" marL="0">
+            <a:pPr marL="0" indent="0" algn="l">
               <a:buNone/>
             </a:pPr>
             <a:r>
@@ -8242,7 +8345,7 @@
           <a:bodyPr wrap="square" lIns="0" tIns="0" rIns="0" bIns="0" rtlCol="0" anchor="ctr"/>
           <a:lstStyle/>
           <a:p>
-            <a:pPr algn="l" indent="0" marL="0">
+            <a:pPr marL="0" indent="0" algn="l">
               <a:buNone/>
             </a:pPr>
             <a:r>
@@ -8281,7 +8384,7 @@
           <a:bodyPr wrap="square" lIns="0" tIns="0" rIns="0" bIns="0" rtlCol="0" anchor="ctr"/>
           <a:lstStyle/>
           <a:p>
-            <a:pPr algn="l" indent="0" marL="0">
+            <a:pPr marL="0" indent="0" algn="l">
               <a:buNone/>
             </a:pPr>
             <a:r>
@@ -8320,7 +8423,7 @@
           <a:bodyPr wrap="square" lIns="0" tIns="0" rIns="0" bIns="0" rtlCol="0" anchor="ctr"/>
           <a:lstStyle/>
           <a:p>
-            <a:pPr algn="l" indent="0" marL="0">
+            <a:pPr marL="0" indent="0" algn="l">
               <a:buNone/>
             </a:pPr>
             <a:r>
@@ -8359,7 +8462,7 @@
           <a:bodyPr wrap="square" lIns="0" tIns="0" rIns="0" bIns="0" rtlCol="0" anchor="ctr"/>
           <a:lstStyle/>
           <a:p>
-            <a:pPr algn="l" indent="0" marL="0">
+            <a:pPr marL="0" indent="0" algn="l">
               <a:buNone/>
             </a:pPr>
             <a:r>
@@ -8398,7 +8501,7 @@
           <a:bodyPr wrap="square" lIns="0" tIns="0" rIns="0" bIns="0" rtlCol="0" anchor="ctr"/>
           <a:lstStyle/>
           <a:p>
-            <a:pPr algn="l" indent="0" marL="0">
+            <a:pPr marL="0" indent="0" algn="l">
               <a:buNone/>
             </a:pPr>
             <a:r>
@@ -8437,7 +8540,7 @@
           <a:bodyPr wrap="square" lIns="0" tIns="0" rIns="0" bIns="0" rtlCol="0" anchor="ctr"/>
           <a:lstStyle/>
           <a:p>
-            <a:pPr algn="l" indent="0" marL="0">
+            <a:pPr marL="0" indent="0" algn="l">
               <a:buNone/>
             </a:pPr>
             <a:r>
@@ -8476,7 +8579,7 @@
           <a:bodyPr wrap="square" lIns="0" tIns="0" rIns="0" bIns="0" rtlCol="0" anchor="ctr"/>
           <a:lstStyle/>
           <a:p>
-            <a:pPr algn="l" indent="0" marL="0">
+            <a:pPr marL="0" indent="0" algn="l">
               <a:buNone/>
             </a:pPr>
             <a:r>
@@ -8515,7 +8618,7 @@
           <a:bodyPr wrap="square" lIns="0" tIns="0" rIns="0" bIns="0" rtlCol="0" anchor="ctr"/>
           <a:lstStyle/>
           <a:p>
-            <a:pPr algn="l" indent="0" marL="0">
+            <a:pPr marL="0" indent="0" algn="l">
               <a:buNone/>
             </a:pPr>
             <a:r>
@@ -8557,6 +8660,13 @@
             <a:prstDash val="solid"/>
           </a:ln>
         </p:spPr>
+        <p:txBody>
+          <a:bodyPr/>
+          <a:lstStyle/>
+          <a:p>
+            <a:endParaRPr lang="en-AU"/>
+          </a:p>
+        </p:txBody>
       </p:sp>
       <p:sp>
         <p:nvSpPr>
@@ -8577,6 +8687,13 @@
           </a:solidFill>
           <a:ln/>
         </p:spPr>
+        <p:txBody>
+          <a:bodyPr/>
+          <a:lstStyle/>
+          <a:p>
+            <a:endParaRPr lang="en-AU"/>
+          </a:p>
+        </p:txBody>
       </p:sp>
       <p:sp>
         <p:nvSpPr>
@@ -8599,11 +8716,11 @@
           <a:bodyPr wrap="square" lIns="0" tIns="0" rIns="0" bIns="0" rtlCol="0" anchor="ctr"/>
           <a:lstStyle/>
           <a:p>
-            <a:pPr algn="ctr" indent="0" marL="0">
-              <a:buNone/>
-            </a:pPr>
-            <a:r>
-              <a:rPr lang="en-US" sz="800" b="1" spc="200" kern="0" dirty="0">
+            <a:pPr marL="0" indent="0" algn="ctr">
+              <a:buNone/>
+            </a:pPr>
+            <a:r>
+              <a:rPr lang="en-US" sz="800" b="1" kern="0" spc="200" dirty="0">
                 <a:solidFill>
                   <a:srgbClr val="FFFFFF"/>
                 </a:solidFill>
@@ -8638,7 +8755,7 @@
           <a:bodyPr wrap="square" lIns="0" tIns="0" rIns="0" bIns="0" rtlCol="0" anchor="ctr"/>
           <a:lstStyle/>
           <a:p>
-            <a:pPr algn="l" indent="0" marL="0">
+            <a:pPr marL="0" indent="0" algn="l">
               <a:buNone/>
             </a:pPr>
             <a:r>
@@ -8677,7 +8794,7 @@
           <a:bodyPr wrap="square" lIns="0" tIns="0" rIns="0" bIns="0" rtlCol="0" anchor="ctr"/>
           <a:lstStyle/>
           <a:p>
-            <a:pPr algn="l" indent="0" marL="0">
+            <a:pPr marL="0" indent="0" algn="l">
               <a:buNone/>
             </a:pPr>
             <a:r>
@@ -8716,7 +8833,7 @@
           <a:bodyPr wrap="square" lIns="0" tIns="0" rIns="0" bIns="0" rtlCol="0" anchor="ctr"/>
           <a:lstStyle/>
           <a:p>
-            <a:pPr algn="l" indent="0" marL="0">
+            <a:pPr marL="0" indent="0" algn="l">
               <a:buNone/>
             </a:pPr>
             <a:r>
@@ -8755,7 +8872,7 @@
           <a:bodyPr wrap="square" lIns="0" tIns="0" rIns="0" bIns="0" rtlCol="0" anchor="ctr"/>
           <a:lstStyle/>
           <a:p>
-            <a:pPr algn="l" indent="0" marL="0">
+            <a:pPr marL="0" indent="0" algn="l">
               <a:buNone/>
             </a:pPr>
             <a:r>
@@ -8794,7 +8911,7 @@
           <a:bodyPr wrap="square" lIns="0" tIns="0" rIns="0" bIns="0" rtlCol="0" anchor="ctr"/>
           <a:lstStyle/>
           <a:p>
-            <a:pPr algn="l" indent="0" marL="0">
+            <a:pPr marL="0" indent="0" algn="l">
               <a:buNone/>
             </a:pPr>
             <a:r>
@@ -8833,7 +8950,7 @@
           <a:bodyPr wrap="square" lIns="0" tIns="0" rIns="0" bIns="0" rtlCol="0" anchor="ctr"/>
           <a:lstStyle/>
           <a:p>
-            <a:pPr algn="l" indent="0" marL="0">
+            <a:pPr marL="0" indent="0" algn="l">
               <a:buNone/>
             </a:pPr>
             <a:r>
@@ -8872,7 +8989,7 @@
           <a:bodyPr wrap="square" lIns="0" tIns="0" rIns="0" bIns="0" rtlCol="0" anchor="ctr"/>
           <a:lstStyle/>
           <a:p>
-            <a:pPr algn="l" indent="0" marL="0">
+            <a:pPr marL="0" indent="0" algn="l">
               <a:buNone/>
             </a:pPr>
             <a:r>
@@ -8911,7 +9028,7 @@
           <a:bodyPr wrap="square" lIns="0" tIns="0" rIns="0" bIns="0" rtlCol="0" anchor="ctr"/>
           <a:lstStyle/>
           <a:p>
-            <a:pPr algn="l" indent="0" marL="0">
+            <a:pPr marL="0" indent="0" algn="l">
               <a:buNone/>
             </a:pPr>
             <a:r>
@@ -8950,7 +9067,7 @@
           <a:bodyPr wrap="square" lIns="0" tIns="0" rIns="0" bIns="0" rtlCol="0" anchor="ctr"/>
           <a:lstStyle/>
           <a:p>
-            <a:pPr algn="l" indent="0" marL="0">
+            <a:pPr marL="0" indent="0" algn="l">
               <a:buNone/>
             </a:pPr>
             <a:r>
@@ -8989,7 +9106,7 @@
           <a:bodyPr wrap="square" lIns="0" tIns="0" rIns="0" bIns="0" rtlCol="0" anchor="ctr"/>
           <a:lstStyle/>
           <a:p>
-            <a:pPr algn="l" indent="0" marL="0">
+            <a:pPr marL="0" indent="0" algn="l">
               <a:buNone/>
             </a:pPr>
             <a:r>
@@ -9028,7 +9145,7 @@
           <a:bodyPr wrap="square" lIns="0" tIns="0" rIns="0" bIns="0" rtlCol="0" anchor="ctr"/>
           <a:lstStyle/>
           <a:p>
-            <a:pPr algn="l" indent="0" marL="0">
+            <a:pPr marL="0" indent="0" algn="l">
               <a:buNone/>
             </a:pPr>
             <a:r>
@@ -9067,7 +9184,7 @@
           <a:bodyPr wrap="square" lIns="0" tIns="0" rIns="0" bIns="0" rtlCol="0" anchor="ctr"/>
           <a:lstStyle/>
           <a:p>
-            <a:pPr algn="l" indent="0" marL="0">
+            <a:pPr marL="0" indent="0" algn="l">
               <a:buNone/>
             </a:pPr>
             <a:r>
@@ -9106,7 +9223,7 @@
           <a:bodyPr wrap="square" lIns="0" tIns="0" rIns="0" bIns="0" rtlCol="0" anchor="ctr"/>
           <a:lstStyle/>
           <a:p>
-            <a:pPr algn="l" indent="0" marL="0">
+            <a:pPr marL="0" indent="0" algn="l">
               <a:buNone/>
             </a:pPr>
             <a:r>
@@ -9145,7 +9262,7 @@
           <a:bodyPr wrap="square" lIns="0" tIns="0" rIns="0" bIns="0" rtlCol="0" anchor="ctr"/>
           <a:lstStyle/>
           <a:p>
-            <a:pPr algn="l" indent="0" marL="0">
+            <a:pPr marL="0" indent="0" algn="l">
               <a:buNone/>
             </a:pPr>
             <a:r>
@@ -9184,7 +9301,7 @@
           <a:bodyPr wrap="square" lIns="0" tIns="0" rIns="0" bIns="0" rtlCol="0" anchor="ctr"/>
           <a:lstStyle/>
           <a:p>
-            <a:pPr algn="l" indent="0" marL="0">
+            <a:pPr marL="0" indent="0" algn="l">
               <a:buNone/>
             </a:pPr>
             <a:r>
@@ -9221,6 +9338,13 @@
           </a:solidFill>
           <a:ln/>
         </p:spPr>
+        <p:txBody>
+          <a:bodyPr/>
+          <a:lstStyle/>
+          <a:p>
+            <a:endParaRPr lang="en-AU"/>
+          </a:p>
+        </p:txBody>
       </p:sp>
       <p:sp>
         <p:nvSpPr>
@@ -9243,7 +9367,7 @@
           <a:bodyPr wrap="square" lIns="0" tIns="0" rIns="0" bIns="0" rtlCol="0" anchor="ctr"/>
           <a:lstStyle/>
           <a:p>
-            <a:pPr algn="l" indent="0" marL="0">
+            <a:pPr marL="0" indent="0" algn="l">
               <a:buNone/>
             </a:pPr>
             <a:r>
@@ -9282,7 +9406,7 @@
           <a:bodyPr wrap="square" lIns="0" tIns="0" rIns="0" bIns="0" rtlCol="0" anchor="ctr"/>
           <a:lstStyle/>
           <a:p>
-            <a:pPr algn="r" indent="0" marL="0">
+            <a:pPr marL="0" indent="0" algn="r">
               <a:buNone/>
             </a:pPr>
             <a:r>
@@ -9316,6 +9440,7 @@
         <a:solidFill>
           <a:srgbClr val="FFFFFF"/>
         </a:solidFill>
+        <a:effectLst/>
       </p:bgPr>
     </p:bg>
     <p:spTree>
@@ -9351,6 +9476,13 @@
           </a:solidFill>
           <a:ln/>
         </p:spPr>
+        <p:txBody>
+          <a:bodyPr/>
+          <a:lstStyle/>
+          <a:p>
+            <a:endParaRPr lang="en-AU"/>
+          </a:p>
+        </p:txBody>
       </p:sp>
       <p:sp>
         <p:nvSpPr>
@@ -9373,11 +9505,11 @@
           <a:bodyPr wrap="square" lIns="0" tIns="0" rIns="0" bIns="0" rtlCol="0" anchor="ctr"/>
           <a:lstStyle/>
           <a:p>
-            <a:pPr algn="l" indent="0" marL="0">
-              <a:buNone/>
-            </a:pPr>
-            <a:r>
-              <a:rPr lang="en-US" sz="1000" b="1" spc="200" kern="0" dirty="0">
+            <a:pPr marL="0" indent="0" algn="l">
+              <a:buNone/>
+            </a:pPr>
+            <a:r>
+              <a:rPr lang="en-US" sz="1000" b="1" kern="0" spc="200" dirty="0">
                 <a:solidFill>
                   <a:srgbClr val="D97757"/>
                 </a:solidFill>
@@ -9412,7 +9544,7 @@
           <a:bodyPr wrap="square" lIns="0" tIns="0" rIns="0" bIns="0" rtlCol="0" anchor="ctr"/>
           <a:lstStyle/>
           <a:p>
-            <a:pPr algn="l" indent="0" marL="0">
+            <a:pPr marL="0" indent="0" algn="l">
               <a:buNone/>
             </a:pPr>
             <a:r>
@@ -9452,6 +9584,13 @@
             <a:prstDash val="solid"/>
           </a:ln>
         </p:spPr>
+        <p:txBody>
+          <a:bodyPr/>
+          <a:lstStyle/>
+          <a:p>
+            <a:endParaRPr lang="en-AU"/>
+          </a:p>
+        </p:txBody>
       </p:sp>
       <p:sp>
         <p:nvSpPr>
@@ -9461,24 +9600,24 @@
         </p:nvSpPr>
         <p:spPr>
           <a:xfrm>
-            <a:off x="457200" y="1691640"/>
-            <a:ext cx="2286000" cy="1645920"/>
-          </a:xfrm>
-          <a:prstGeom prst="rect">
-            <a:avLst/>
-          </a:prstGeom>
-          <a:noFill/>
-          <a:ln/>
-        </p:spPr>
-        <p:txBody>
-          <a:bodyPr wrap="square" lIns="0" tIns="0" rIns="0" bIns="0" rtlCol="0" anchor="ctr"/>
-          <a:lstStyle/>
-          <a:p>
-            <a:pPr algn="l" indent="0" marL="0">
-              <a:buNone/>
-            </a:pPr>
-            <a:r>
-              <a:rPr lang="en-US" sz="14000" b="1" dirty="0">
+            <a:off x="457199" y="1691640"/>
+            <a:ext cx="3381983" cy="1645920"/>
+          </a:xfrm>
+          <a:prstGeom prst="rect">
+            <a:avLst/>
+          </a:prstGeom>
+          <a:noFill/>
+          <a:ln/>
+        </p:spPr>
+        <p:txBody>
+          <a:bodyPr wrap="square" lIns="0" tIns="0" rIns="0" bIns="0" rtlCol="0" anchor="ctr"/>
+          <a:lstStyle/>
+          <a:p>
+            <a:pPr marL="0" indent="0" algn="l">
+              <a:buNone/>
+            </a:pPr>
+            <a:r>
+              <a:rPr lang="en-US" sz="9800" b="1" dirty="0">
                 <a:solidFill>
                   <a:srgbClr val="D97757"/>
                 </a:solidFill>
@@ -9488,7 +9627,7 @@
               </a:rPr>
               <a:t>100</a:t>
             </a:r>
-            <a:endParaRPr lang="en-US" sz="14000" dirty="0"/>
+            <a:endParaRPr lang="en-US" sz="9800" dirty="0"/>
           </a:p>
         </p:txBody>
       </p:sp>
@@ -9513,11 +9652,11 @@
           <a:bodyPr wrap="square" lIns="0" tIns="0" rIns="0" bIns="0" rtlCol="0" anchor="ctr"/>
           <a:lstStyle/>
           <a:p>
-            <a:pPr algn="l" indent="0" marL="0">
-              <a:buNone/>
-            </a:pPr>
-            <a:r>
-              <a:rPr lang="en-US" sz="1200" b="1" spc="100" kern="0" dirty="0">
+            <a:pPr marL="0" indent="0" algn="l">
+              <a:buNone/>
+            </a:pPr>
+            <a:r>
+              <a:rPr lang="en-US" sz="1200" b="1" kern="0" spc="100" dirty="0">
                 <a:solidFill>
                   <a:srgbClr val="4D4D4D"/>
                 </a:solidFill>
@@ -9552,11 +9691,11 @@
           <a:bodyPr wrap="square" lIns="0" tIns="0" rIns="0" bIns="0" rtlCol="0" anchor="ctr"/>
           <a:lstStyle/>
           <a:p>
-            <a:pPr algn="l" indent="0" marL="0">
-              <a:buNone/>
-            </a:pPr>
-            <a:r>
-              <a:rPr lang="en-US" sz="1100" b="1" spc="200" kern="0" dirty="0">
+            <a:pPr marL="0" indent="0" algn="l">
+              <a:buNone/>
+            </a:pPr>
+            <a:r>
+              <a:rPr lang="en-US" sz="1100" b="1" kern="0" spc="200" dirty="0">
                 <a:solidFill>
                   <a:srgbClr val="D97757"/>
                 </a:solidFill>
@@ -9591,7 +9730,7 @@
           <a:bodyPr wrap="square" lIns="0" tIns="0" rIns="0" bIns="0" rtlCol="0" anchor="t"/>
           <a:lstStyle/>
           <a:p>
-            <a:pPr algn="l" indent="0" marL="0">
+            <a:pPr marL="0" indent="0" algn="l">
               <a:buNone/>
             </a:pPr>
             <a:r>
@@ -9630,7 +9769,7 @@
           <a:bodyPr wrap="square" lIns="0" tIns="0" rIns="0" bIns="0" rtlCol="0" anchor="t"/>
           <a:lstStyle/>
           <a:p>
-            <a:pPr algn="l" indent="0" marL="0">
+            <a:pPr marL="0" indent="0" algn="l">
               <a:buNone/>
             </a:pPr>
             <a:r>
@@ -9669,11 +9808,11 @@
           <a:bodyPr wrap="square" lIns="0" tIns="0" rIns="0" bIns="0" rtlCol="0" anchor="ctr"/>
           <a:lstStyle/>
           <a:p>
-            <a:pPr algn="l" indent="0" marL="0">
-              <a:buNone/>
-            </a:pPr>
-            <a:r>
-              <a:rPr lang="en-US" sz="1100" b="1" spc="200" kern="0" dirty="0">
+            <a:pPr marL="0" indent="0" algn="l">
+              <a:buNone/>
+            </a:pPr>
+            <a:r>
+              <a:rPr lang="en-US" sz="1100" b="1" kern="0" spc="200" dirty="0">
                 <a:solidFill>
                   <a:srgbClr val="D97757"/>
                 </a:solidFill>
@@ -9812,6 +9951,13 @@
           </a:solidFill>
           <a:ln/>
         </p:spPr>
+        <p:txBody>
+          <a:bodyPr/>
+          <a:lstStyle/>
+          <a:p>
+            <a:endParaRPr lang="en-AU"/>
+          </a:p>
+        </p:txBody>
       </p:sp>
       <p:sp>
         <p:nvSpPr>
@@ -9834,7 +9980,7 @@
           <a:bodyPr wrap="square" lIns="0" tIns="0" rIns="0" bIns="0" rtlCol="0" anchor="ctr"/>
           <a:lstStyle/>
           <a:p>
-            <a:pPr algn="l" indent="0" marL="0">
+            <a:pPr marL="0" indent="0" algn="l">
               <a:buNone/>
             </a:pPr>
             <a:r>
@@ -9873,7 +10019,7 @@
           <a:bodyPr wrap="square" lIns="0" tIns="0" rIns="0" bIns="0" rtlCol="0" anchor="ctr"/>
           <a:lstStyle/>
           <a:p>
-            <a:pPr algn="r" indent="0" marL="0">
+            <a:pPr marL="0" indent="0" algn="r">
               <a:buNone/>
             </a:pPr>
             <a:r>
@@ -9907,6 +10053,7 @@
         <a:solidFill>
           <a:srgbClr val="FFFFFF"/>
         </a:solidFill>
+        <a:effectLst/>
       </p:bgPr>
     </p:bg>
     <p:spTree>
@@ -9942,6 +10089,13 @@
           </a:solidFill>
           <a:ln/>
         </p:spPr>
+        <p:txBody>
+          <a:bodyPr/>
+          <a:lstStyle/>
+          <a:p>
+            <a:endParaRPr lang="en-AU"/>
+          </a:p>
+        </p:txBody>
       </p:sp>
       <p:sp>
         <p:nvSpPr>
@@ -9964,11 +10118,11 @@
           <a:bodyPr wrap="square" lIns="0" tIns="0" rIns="0" bIns="0" rtlCol="0" anchor="ctr"/>
           <a:lstStyle/>
           <a:p>
-            <a:pPr algn="l" indent="0" marL="0">
-              <a:buNone/>
-            </a:pPr>
-            <a:r>
-              <a:rPr lang="en-US" sz="1000" b="1" spc="200" kern="0" dirty="0">
+            <a:pPr marL="0" indent="0" algn="l">
+              <a:buNone/>
+            </a:pPr>
+            <a:r>
+              <a:rPr lang="en-US" sz="1000" b="1" kern="0" spc="200" dirty="0">
                 <a:solidFill>
                   <a:srgbClr val="D97757"/>
                 </a:solidFill>
@@ -10003,7 +10157,7 @@
           <a:bodyPr wrap="square" lIns="0" tIns="0" rIns="0" bIns="0" rtlCol="0" anchor="ctr"/>
           <a:lstStyle/>
           <a:p>
-            <a:pPr algn="l" indent="0" marL="0">
+            <a:pPr marL="0" indent="0" algn="l">
               <a:buNone/>
             </a:pPr>
             <a:r>
@@ -10043,6 +10197,13 @@
             <a:prstDash val="solid"/>
           </a:ln>
         </p:spPr>
+        <p:txBody>
+          <a:bodyPr/>
+          <a:lstStyle/>
+          <a:p>
+            <a:endParaRPr lang="en-AU"/>
+          </a:p>
+        </p:txBody>
       </p:sp>
       <p:sp>
         <p:nvSpPr>
@@ -10065,7 +10226,7 @@
           <a:bodyPr wrap="square" lIns="0" tIns="0" rIns="0" bIns="0" rtlCol="0" anchor="t"/>
           <a:lstStyle/>
           <a:p>
-            <a:pPr algn="l" indent="0" marL="0">
+            <a:pPr marL="0" indent="0" algn="l">
               <a:buNone/>
             </a:pPr>
             <a:r>
@@ -10107,6 +10268,13 @@
             <a:prstDash val="solid"/>
           </a:ln>
         </p:spPr>
+        <p:txBody>
+          <a:bodyPr/>
+          <a:lstStyle/>
+          <a:p>
+            <a:endParaRPr lang="en-AU"/>
+          </a:p>
+        </p:txBody>
       </p:sp>
       <p:sp>
         <p:nvSpPr>
@@ -10127,6 +10295,13 @@
           </a:solidFill>
           <a:ln/>
         </p:spPr>
+        <p:txBody>
+          <a:bodyPr/>
+          <a:lstStyle/>
+          <a:p>
+            <a:endParaRPr lang="en-AU"/>
+          </a:p>
+        </p:txBody>
       </p:sp>
       <p:sp>
         <p:nvSpPr>
@@ -10149,7 +10324,7 @@
           <a:bodyPr wrap="square" lIns="0" tIns="0" rIns="0" bIns="0" rtlCol="0" anchor="ctr"/>
           <a:lstStyle/>
           <a:p>
-            <a:pPr algn="l" indent="0" marL="0">
+            <a:pPr marL="0" indent="0" algn="l">
               <a:buNone/>
             </a:pPr>
             <a:r>
@@ -10188,7 +10363,7 @@
           <a:bodyPr wrap="square" lIns="0" tIns="0" rIns="0" bIns="0" rtlCol="0" anchor="t"/>
           <a:lstStyle/>
           <a:p>
-            <a:pPr algn="l" indent="0" marL="0">
+            <a:pPr marL="0" indent="0" algn="l">
               <a:buNone/>
             </a:pPr>
             <a:r>
@@ -10227,7 +10402,7 @@
           <a:bodyPr wrap="square" lIns="0" tIns="0" rIns="0" bIns="0" rtlCol="0" anchor="ctr"/>
           <a:lstStyle/>
           <a:p>
-            <a:pPr algn="l" indent="0" marL="0">
+            <a:pPr marL="0" indent="0" algn="l">
               <a:buNone/>
             </a:pPr>
             <a:r>
@@ -10266,7 +10441,7 @@
           <a:bodyPr wrap="square" lIns="0" tIns="0" rIns="0" bIns="0" rtlCol="0" anchor="ctr"/>
           <a:lstStyle/>
           <a:p>
-            <a:pPr algn="l" indent="0" marL="0">
+            <a:pPr marL="0" indent="0" algn="l">
               <a:buNone/>
             </a:pPr>
             <a:r>
@@ -10305,7 +10480,7 @@
           <a:bodyPr wrap="square" lIns="0" tIns="0" rIns="0" bIns="0" rtlCol="0" anchor="ctr"/>
           <a:lstStyle/>
           <a:p>
-            <a:pPr algn="l" indent="0" marL="0">
+            <a:pPr marL="0" indent="0" algn="l">
               <a:buNone/>
             </a:pPr>
             <a:r>
@@ -10344,7 +10519,7 @@
           <a:bodyPr wrap="square" lIns="0" tIns="0" rIns="0" bIns="0" rtlCol="0" anchor="t"/>
           <a:lstStyle/>
           <a:p>
-            <a:pPr algn="l" indent="0" marL="0">
+            <a:pPr marL="0" indent="0" algn="l">
               <a:buNone/>
             </a:pPr>
             <a:r>
@@ -10386,6 +10561,13 @@
             <a:prstDash val="solid"/>
           </a:ln>
         </p:spPr>
+        <p:txBody>
+          <a:bodyPr/>
+          <a:lstStyle/>
+          <a:p>
+            <a:endParaRPr lang="en-AU"/>
+          </a:p>
+        </p:txBody>
       </p:sp>
       <p:sp>
         <p:nvSpPr>
@@ -10406,6 +10588,13 @@
           </a:solidFill>
           <a:ln/>
         </p:spPr>
+        <p:txBody>
+          <a:bodyPr/>
+          <a:lstStyle/>
+          <a:p>
+            <a:endParaRPr lang="en-AU"/>
+          </a:p>
+        </p:txBody>
       </p:sp>
       <p:sp>
         <p:nvSpPr>
@@ -10428,7 +10617,7 @@
           <a:bodyPr wrap="square" lIns="0" tIns="0" rIns="0" bIns="0" rtlCol="0" anchor="ctr"/>
           <a:lstStyle/>
           <a:p>
-            <a:pPr algn="l" indent="0" marL="0">
+            <a:pPr marL="0" indent="0" algn="l">
               <a:buNone/>
             </a:pPr>
             <a:r>
@@ -10467,7 +10656,7 @@
           <a:bodyPr wrap="square" lIns="0" tIns="0" rIns="0" bIns="0" rtlCol="0" anchor="t"/>
           <a:lstStyle/>
           <a:p>
-            <a:pPr algn="l" indent="0" marL="0">
+            <a:pPr marL="0" indent="0" algn="l">
               <a:buNone/>
             </a:pPr>
             <a:r>
@@ -10506,7 +10695,7 @@
           <a:bodyPr wrap="square" lIns="0" tIns="0" rIns="0" bIns="0" rtlCol="0" anchor="ctr"/>
           <a:lstStyle/>
           <a:p>
-            <a:pPr algn="l" indent="0" marL="0">
+            <a:pPr marL="0" indent="0" algn="l">
               <a:buNone/>
             </a:pPr>
             <a:r>
@@ -10545,7 +10734,7 @@
           <a:bodyPr wrap="square" lIns="0" tIns="0" rIns="0" bIns="0" rtlCol="0" anchor="ctr"/>
           <a:lstStyle/>
           <a:p>
-            <a:pPr algn="l" indent="0" marL="0">
+            <a:pPr marL="0" indent="0" algn="l">
               <a:buNone/>
             </a:pPr>
             <a:r>
@@ -10584,7 +10773,7 @@
           <a:bodyPr wrap="square" lIns="0" tIns="0" rIns="0" bIns="0" rtlCol="0" anchor="ctr"/>
           <a:lstStyle/>
           <a:p>
-            <a:pPr algn="l" indent="0" marL="0">
+            <a:pPr marL="0" indent="0" algn="l">
               <a:buNone/>
             </a:pPr>
             <a:r>
@@ -10623,7 +10812,7 @@
           <a:bodyPr wrap="square" lIns="0" tIns="0" rIns="0" bIns="0" rtlCol="0" anchor="t"/>
           <a:lstStyle/>
           <a:p>
-            <a:pPr algn="l" indent="0" marL="0">
+            <a:pPr marL="0" indent="0" algn="l">
               <a:buNone/>
             </a:pPr>
             <a:r>
@@ -10665,6 +10854,13 @@
             <a:prstDash val="solid"/>
           </a:ln>
         </p:spPr>
+        <p:txBody>
+          <a:bodyPr/>
+          <a:lstStyle/>
+          <a:p>
+            <a:endParaRPr lang="en-AU"/>
+          </a:p>
+        </p:txBody>
       </p:sp>
       <p:sp>
         <p:nvSpPr>
@@ -10685,6 +10881,13 @@
           </a:solidFill>
           <a:ln/>
         </p:spPr>
+        <p:txBody>
+          <a:bodyPr/>
+          <a:lstStyle/>
+          <a:p>
+            <a:endParaRPr lang="en-AU"/>
+          </a:p>
+        </p:txBody>
       </p:sp>
       <p:sp>
         <p:nvSpPr>
@@ -10707,7 +10910,7 @@
           <a:bodyPr wrap="square" lIns="0" tIns="0" rIns="0" bIns="0" rtlCol="0" anchor="ctr"/>
           <a:lstStyle/>
           <a:p>
-            <a:pPr algn="l" indent="0" marL="0">
+            <a:pPr marL="0" indent="0" algn="l">
               <a:buNone/>
             </a:pPr>
             <a:r>
@@ -10746,7 +10949,7 @@
           <a:bodyPr wrap="square" lIns="0" tIns="0" rIns="0" bIns="0" rtlCol="0" anchor="t"/>
           <a:lstStyle/>
           <a:p>
-            <a:pPr algn="l" indent="0" marL="0">
+            <a:pPr marL="0" indent="0" algn="l">
               <a:buNone/>
             </a:pPr>
             <a:r>
@@ -10785,7 +10988,7 @@
           <a:bodyPr wrap="square" lIns="0" tIns="0" rIns="0" bIns="0" rtlCol="0" anchor="ctr"/>
           <a:lstStyle/>
           <a:p>
-            <a:pPr algn="l" indent="0" marL="0">
+            <a:pPr marL="0" indent="0" algn="l">
               <a:buNone/>
             </a:pPr>
             <a:r>
@@ -10824,7 +11027,7 @@
           <a:bodyPr wrap="square" lIns="0" tIns="0" rIns="0" bIns="0" rtlCol="0" anchor="ctr"/>
           <a:lstStyle/>
           <a:p>
-            <a:pPr algn="l" indent="0" marL="0">
+            <a:pPr marL="0" indent="0" algn="l">
               <a:buNone/>
             </a:pPr>
             <a:r>
@@ -10863,7 +11066,7 @@
           <a:bodyPr wrap="square" lIns="0" tIns="0" rIns="0" bIns="0" rtlCol="0" anchor="ctr"/>
           <a:lstStyle/>
           <a:p>
-            <a:pPr algn="l" indent="0" marL="0">
+            <a:pPr marL="0" indent="0" algn="l">
               <a:buNone/>
             </a:pPr>
             <a:r>
@@ -10902,7 +11105,7 @@
           <a:bodyPr wrap="square" lIns="0" tIns="0" rIns="0" bIns="0" rtlCol="0" anchor="t"/>
           <a:lstStyle/>
           <a:p>
-            <a:pPr algn="l" indent="0" marL="0">
+            <a:pPr marL="0" indent="0" algn="l">
               <a:buNone/>
             </a:pPr>
             <a:r>
@@ -10941,7 +11144,7 @@
           <a:bodyPr wrap="square" lIns="0" tIns="0" rIns="0" bIns="0" rtlCol="0" anchor="ctr"/>
           <a:lstStyle/>
           <a:p>
-            <a:pPr algn="l" indent="0" marL="0">
+            <a:pPr marL="0" indent="0" algn="l">
               <a:buNone/>
             </a:pPr>
             <a:r>
@@ -10978,6 +11181,13 @@
           </a:solidFill>
           <a:ln/>
         </p:spPr>
+        <p:txBody>
+          <a:bodyPr/>
+          <a:lstStyle/>
+          <a:p>
+            <a:endParaRPr lang="en-AU"/>
+          </a:p>
+        </p:txBody>
       </p:sp>
       <p:sp>
         <p:nvSpPr>
@@ -11000,7 +11210,7 @@
           <a:bodyPr wrap="square" lIns="0" tIns="0" rIns="0" bIns="0" rtlCol="0" anchor="ctr"/>
           <a:lstStyle/>
           <a:p>
-            <a:pPr algn="l" indent="0" marL="0">
+            <a:pPr marL="0" indent="0" algn="l">
               <a:buNone/>
             </a:pPr>
             <a:r>
@@ -11039,7 +11249,7 @@
           <a:bodyPr wrap="square" lIns="0" tIns="0" rIns="0" bIns="0" rtlCol="0" anchor="ctr"/>
           <a:lstStyle/>
           <a:p>
-            <a:pPr algn="r" indent="0" marL="0">
+            <a:pPr marL="0" indent="0" algn="r">
               <a:buNone/>
             </a:pPr>
             <a:r>
@@ -11073,6 +11283,7 @@
         <a:solidFill>
           <a:srgbClr val="FFFFFF"/>
         </a:solidFill>
+        <a:effectLst/>
       </p:bgPr>
     </p:bg>
     <p:spTree>
@@ -11108,6 +11319,13 @@
           </a:solidFill>
           <a:ln/>
         </p:spPr>
+        <p:txBody>
+          <a:bodyPr/>
+          <a:lstStyle/>
+          <a:p>
+            <a:endParaRPr lang="en-AU"/>
+          </a:p>
+        </p:txBody>
       </p:sp>
       <p:sp>
         <p:nvSpPr>
@@ -11130,11 +11348,11 @@
           <a:bodyPr wrap="square" lIns="0" tIns="0" rIns="0" bIns="0" rtlCol="0" anchor="ctr"/>
           <a:lstStyle/>
           <a:p>
-            <a:pPr algn="l" indent="0" marL="0">
-              <a:buNone/>
-            </a:pPr>
-            <a:r>
-              <a:rPr lang="en-US" sz="1000" b="1" spc="200" kern="0" dirty="0">
+            <a:pPr marL="0" indent="0" algn="l">
+              <a:buNone/>
+            </a:pPr>
+            <a:r>
+              <a:rPr lang="en-US" sz="1000" b="1" kern="0" spc="200" dirty="0">
                 <a:solidFill>
                   <a:srgbClr val="D97757"/>
                 </a:solidFill>
@@ -11169,7 +11387,7 @@
           <a:bodyPr wrap="square" lIns="0" tIns="0" rIns="0" bIns="0" rtlCol="0" anchor="ctr"/>
           <a:lstStyle/>
           <a:p>
-            <a:pPr algn="l" indent="0" marL="0">
+            <a:pPr marL="0" indent="0" algn="l">
               <a:buNone/>
             </a:pPr>
             <a:r>
@@ -11209,6 +11427,13 @@
             <a:prstDash val="solid"/>
           </a:ln>
         </p:spPr>
+        <p:txBody>
+          <a:bodyPr/>
+          <a:lstStyle/>
+          <a:p>
+            <a:endParaRPr lang="en-AU"/>
+          </a:p>
+        </p:txBody>
       </p:sp>
       <p:graphicFrame>
         <p:nvGraphicFramePr>
@@ -11226,17 +11451,41 @@
         </p:nvGraphicFramePr>
         <p:xfrm>
           <a:off x="457200" y="1600200"/>
-          <a:ext cx="8229600" cy="914400"/>
+          <a:ext cx="8229600" cy="2011680"/>
         </p:xfrm>
         <a:graphic>
           <a:graphicData uri="http://schemas.openxmlformats.org/drawingml/2006/table">
             <a:tbl>
               <a:tblPr/>
               <a:tblGrid>
-                <a:gridCol w="2194560"/>
-                <a:gridCol w="2560320"/>
-                <a:gridCol w="1828800"/>
-                <a:gridCol w="1645920"/>
+                <a:gridCol w="2194560">
+                  <a:extLst>
+                    <a:ext uri="{9D8B030D-6E8A-4147-A177-3AD203B41FA5}">
+                      <a16:colId xmlns:a16="http://schemas.microsoft.com/office/drawing/2014/main" val="20000"/>
+                    </a:ext>
+                  </a:extLst>
+                </a:gridCol>
+                <a:gridCol w="2560320">
+                  <a:extLst>
+                    <a:ext uri="{9D8B030D-6E8A-4147-A177-3AD203B41FA5}">
+                      <a16:colId xmlns:a16="http://schemas.microsoft.com/office/drawing/2014/main" val="20001"/>
+                    </a:ext>
+                  </a:extLst>
+                </a:gridCol>
+                <a:gridCol w="1828800">
+                  <a:extLst>
+                    <a:ext uri="{9D8B030D-6E8A-4147-A177-3AD203B41FA5}">
+                      <a16:colId xmlns:a16="http://schemas.microsoft.com/office/drawing/2014/main" val="20002"/>
+                    </a:ext>
+                  </a:extLst>
+                </a:gridCol>
+                <a:gridCol w="1645920">
+                  <a:extLst>
+                    <a:ext uri="{9D8B030D-6E8A-4147-A177-3AD203B41FA5}">
+                      <a16:colId xmlns:a16="http://schemas.microsoft.com/office/drawing/2014/main" val="20003"/>
+                    </a:ext>
+                  </a:extLst>
+                </a:gridCol>
               </a:tblGrid>
               <a:tr h="502920">
                 <a:tc>
@@ -11244,7 +11493,7 @@
                     <a:bodyPr/>
                     <a:lstStyle/>
                     <a:p>
-                      <a:pPr indent="0" marL="0">
+                      <a:pPr marL="0" indent="0">
                         <a:buNone/>
                       </a:pPr>
                       <a:r>
@@ -11265,7 +11514,7 @@
                       </a:endParaRPr>
                     </a:p>
                   </a:txBody>
-                  <a:tcPr marL="91440" marR="91440" marT="45720" marB="45720" anchor="ctr">
+                  <a:tcPr anchor="ctr">
                     <a:lnL w="6350" cap="flat" cmpd="sng" algn="ctr">
                       <a:solidFill>
                         <a:srgbClr val="E6E5E0"/>
@@ -11312,7 +11561,7 @@
                     <a:bodyPr/>
                     <a:lstStyle/>
                     <a:p>
-                      <a:pPr algn="ctr" indent="0" marL="0">
+                      <a:pPr marL="0" indent="0" algn="ctr">
                         <a:buNone/>
                       </a:pPr>
                       <a:r>
@@ -11333,7 +11582,7 @@
                       </a:endParaRPr>
                     </a:p>
                   </a:txBody>
-                  <a:tcPr marL="91440" marR="91440" marT="45720" marB="45720" anchor="ctr">
+                  <a:tcPr anchor="ctr">
                     <a:lnL w="6350" cap="flat" cmpd="sng" algn="ctr">
                       <a:solidFill>
                         <a:srgbClr val="E6E5E0"/>
@@ -11380,7 +11629,7 @@
                     <a:bodyPr/>
                     <a:lstStyle/>
                     <a:p>
-                      <a:pPr algn="ctr" indent="0" marL="0">
+                      <a:pPr marL="0" indent="0" algn="ctr">
                         <a:buNone/>
                       </a:pPr>
                       <a:r>
@@ -11401,7 +11650,7 @@
                       </a:endParaRPr>
                     </a:p>
                   </a:txBody>
-                  <a:tcPr marL="91440" marR="91440" marT="45720" marB="45720" anchor="ctr">
+                  <a:tcPr anchor="ctr">
                     <a:lnL w="6350" cap="flat" cmpd="sng" algn="ctr">
                       <a:solidFill>
                         <a:srgbClr val="E6E5E0"/>
@@ -11448,7 +11697,7 @@
                     <a:bodyPr/>
                     <a:lstStyle/>
                     <a:p>
-                      <a:pPr algn="ctr" indent="0" marL="0">
+                      <a:pPr marL="0" indent="0" algn="ctr">
                         <a:buNone/>
                       </a:pPr>
                       <a:r>
@@ -11469,7 +11718,7 @@
                       </a:endParaRPr>
                     </a:p>
                   </a:txBody>
-                  <a:tcPr marL="91440" marR="91440" marT="45720" marB="45720" anchor="ctr">
+                  <a:tcPr anchor="ctr">
                     <a:lnL w="6350" cap="flat" cmpd="sng" algn="ctr">
                       <a:solidFill>
                         <a:srgbClr val="E6E5E0"/>
@@ -11511,6 +11760,11 @@
                     </a:solidFill>
                   </a:tcPr>
                 </a:tc>
+                <a:extLst>
+                  <a:ext uri="{0D108BD9-81ED-4DB2-BD59-A6C34878D82A}">
+                    <a16:rowId xmlns:a16="http://schemas.microsoft.com/office/drawing/2014/main" val="10000"/>
+                  </a:ext>
+                </a:extLst>
               </a:tr>
               <a:tr h="502920">
                 <a:tc>
@@ -11518,7 +11772,7 @@
                     <a:bodyPr/>
                     <a:lstStyle/>
                     <a:p>
-                      <a:pPr indent="0" marL="0">
+                      <a:pPr marL="0" indent="0">
                         <a:buNone/>
                       </a:pPr>
                       <a:r>
@@ -11539,7 +11793,7 @@
                       </a:endParaRPr>
                     </a:p>
                   </a:txBody>
-                  <a:tcPr marL="91440" marR="91440" marT="45720" marB="45720" anchor="ctr">
+                  <a:tcPr anchor="ctr">
                     <a:lnL w="6350" cap="flat" cmpd="sng" algn="ctr">
                       <a:solidFill>
                         <a:srgbClr val="E6E5E0"/>
@@ -11583,7 +11837,7 @@
                     <a:bodyPr/>
                     <a:lstStyle/>
                     <a:p>
-                      <a:pPr algn="ctr" indent="0" marL="0">
+                      <a:pPr marL="0" indent="0" algn="ctr">
                         <a:buNone/>
                       </a:pPr>
                       <a:r>
@@ -11604,7 +11858,7 @@
                       </a:endParaRPr>
                     </a:p>
                   </a:txBody>
-                  <a:tcPr marL="91440" marR="91440" marT="45720" marB="45720" anchor="ctr">
+                  <a:tcPr anchor="ctr">
                     <a:lnL w="6350" cap="flat" cmpd="sng" algn="ctr">
                       <a:solidFill>
                         <a:srgbClr val="E6E5E0"/>
@@ -11648,7 +11902,7 @@
                     <a:bodyPr/>
                     <a:lstStyle/>
                     <a:p>
-                      <a:pPr algn="ctr" indent="0" marL="0">
+                      <a:pPr marL="0" indent="0" algn="ctr">
                         <a:buNone/>
                       </a:pPr>
                       <a:r>
@@ -11669,7 +11923,7 @@
                       </a:endParaRPr>
                     </a:p>
                   </a:txBody>
-                  <a:tcPr marL="91440" marR="91440" marT="45720" marB="45720" anchor="ctr">
+                  <a:tcPr anchor="ctr">
                     <a:lnL w="6350" cap="flat" cmpd="sng" algn="ctr">
                       <a:solidFill>
                         <a:srgbClr val="E6E5E0"/>
@@ -11713,7 +11967,7 @@
                     <a:bodyPr/>
                     <a:lstStyle/>
                     <a:p>
-                      <a:pPr algn="ctr" indent="0" marL="0">
+                      <a:pPr marL="0" indent="0" algn="ctr">
                         <a:buNone/>
                       </a:pPr>
                       <a:r>
@@ -11734,7 +11988,7 @@
                       </a:endParaRPr>
                     </a:p>
                   </a:txBody>
-                  <a:tcPr marL="91440" marR="91440" marT="45720" marB="45720" anchor="ctr">
+                  <a:tcPr anchor="ctr">
                     <a:lnL w="6350" cap="flat" cmpd="sng" algn="ctr">
                       <a:solidFill>
                         <a:srgbClr val="E6E5E0"/>
@@ -11773,6 +12027,11 @@
                     </a:lnB>
                   </a:tcPr>
                 </a:tc>
+                <a:extLst>
+                  <a:ext uri="{0D108BD9-81ED-4DB2-BD59-A6C34878D82A}">
+                    <a16:rowId xmlns:a16="http://schemas.microsoft.com/office/drawing/2014/main" val="10001"/>
+                  </a:ext>
+                </a:extLst>
               </a:tr>
               <a:tr h="502920">
                 <a:tc>
@@ -11780,7 +12039,7 @@
                     <a:bodyPr/>
                     <a:lstStyle/>
                     <a:p>
-                      <a:pPr indent="0" marL="0">
+                      <a:pPr marL="0" indent="0">
                         <a:buNone/>
                       </a:pPr>
                       <a:r>
@@ -11801,7 +12060,7 @@
                       </a:endParaRPr>
                     </a:p>
                   </a:txBody>
-                  <a:tcPr marL="91440" marR="91440" marT="45720" marB="45720" anchor="ctr">
+                  <a:tcPr anchor="ctr">
                     <a:lnL w="6350" cap="flat" cmpd="sng" algn="ctr">
                       <a:solidFill>
                         <a:srgbClr val="E6E5E0"/>
@@ -11845,7 +12104,7 @@
                     <a:bodyPr/>
                     <a:lstStyle/>
                     <a:p>
-                      <a:pPr algn="ctr" indent="0" marL="0">
+                      <a:pPr marL="0" indent="0" algn="ctr">
                         <a:buNone/>
                       </a:pPr>
                       <a:r>
@@ -11866,7 +12125,7 @@
                       </a:endParaRPr>
                     </a:p>
                   </a:txBody>
-                  <a:tcPr marL="91440" marR="91440" marT="45720" marB="45720" anchor="ctr">
+                  <a:tcPr anchor="ctr">
                     <a:lnL w="6350" cap="flat" cmpd="sng" algn="ctr">
                       <a:solidFill>
                         <a:srgbClr val="E6E5E0"/>
@@ -11910,7 +12169,7 @@
                     <a:bodyPr/>
                     <a:lstStyle/>
                     <a:p>
-                      <a:pPr algn="ctr" indent="0" marL="0">
+                      <a:pPr marL="0" indent="0" algn="ctr">
                         <a:buNone/>
                       </a:pPr>
                       <a:r>
@@ -11931,7 +12190,7 @@
                       </a:endParaRPr>
                     </a:p>
                   </a:txBody>
-                  <a:tcPr marL="91440" marR="91440" marT="45720" marB="45720" anchor="ctr">
+                  <a:tcPr anchor="ctr">
                     <a:lnL w="6350" cap="flat" cmpd="sng" algn="ctr">
                       <a:solidFill>
                         <a:srgbClr val="E6E5E0"/>
@@ -11975,7 +12234,7 @@
                     <a:bodyPr/>
                     <a:lstStyle/>
                     <a:p>
-                      <a:pPr algn="ctr" indent="0" marL="0">
+                      <a:pPr marL="0" indent="0" algn="ctr">
                         <a:buNone/>
                       </a:pPr>
                       <a:r>
@@ -11996,7 +12255,7 @@
                       </a:endParaRPr>
                     </a:p>
                   </a:txBody>
-                  <a:tcPr marL="91440" marR="91440" marT="45720" marB="45720" anchor="ctr">
+                  <a:tcPr anchor="ctr">
                     <a:lnL w="6350" cap="flat" cmpd="sng" algn="ctr">
                       <a:solidFill>
                         <a:srgbClr val="E6E5E0"/>
@@ -12035,6 +12294,11 @@
                     </a:lnB>
                   </a:tcPr>
                 </a:tc>
+                <a:extLst>
+                  <a:ext uri="{0D108BD9-81ED-4DB2-BD59-A6C34878D82A}">
+                    <a16:rowId xmlns:a16="http://schemas.microsoft.com/office/drawing/2014/main" val="10002"/>
+                  </a:ext>
+                </a:extLst>
               </a:tr>
               <a:tr h="502920">
                 <a:tc>
@@ -12042,7 +12306,7 @@
                     <a:bodyPr/>
                     <a:lstStyle/>
                     <a:p>
-                      <a:pPr indent="0" marL="0">
+                      <a:pPr marL="0" indent="0">
                         <a:buNone/>
                       </a:pPr>
                       <a:r>
@@ -12063,7 +12327,7 @@
                       </a:endParaRPr>
                     </a:p>
                   </a:txBody>
-                  <a:tcPr marL="91440" marR="91440" marT="45720" marB="45720" anchor="ctr">
+                  <a:tcPr anchor="ctr">
                     <a:lnL w="6350" cap="flat" cmpd="sng" algn="ctr">
                       <a:solidFill>
                         <a:srgbClr val="E6E5E0"/>
@@ -12107,7 +12371,7 @@
                     <a:bodyPr/>
                     <a:lstStyle/>
                     <a:p>
-                      <a:pPr algn="ctr" indent="0" marL="0">
+                      <a:pPr marL="0" indent="0" algn="ctr">
                         <a:buNone/>
                       </a:pPr>
                       <a:r>
@@ -12128,7 +12392,7 @@
                       </a:endParaRPr>
                     </a:p>
                   </a:txBody>
-                  <a:tcPr marL="91440" marR="91440" marT="45720" marB="45720" anchor="ctr">
+                  <a:tcPr anchor="ctr">
                     <a:lnL w="6350" cap="flat" cmpd="sng" algn="ctr">
                       <a:solidFill>
                         <a:srgbClr val="E6E5E0"/>
@@ -12172,7 +12436,7 @@
                     <a:bodyPr/>
                     <a:lstStyle/>
                     <a:p>
-                      <a:pPr algn="ctr" indent="0" marL="0">
+                      <a:pPr marL="0" indent="0" algn="ctr">
                         <a:buNone/>
                       </a:pPr>
                       <a:r>
@@ -12193,7 +12457,7 @@
                       </a:endParaRPr>
                     </a:p>
                   </a:txBody>
-                  <a:tcPr marL="91440" marR="91440" marT="45720" marB="45720" anchor="ctr">
+                  <a:tcPr anchor="ctr">
                     <a:lnL w="6350" cap="flat" cmpd="sng" algn="ctr">
                       <a:solidFill>
                         <a:srgbClr val="E6E5E0"/>
@@ -12237,7 +12501,7 @@
                     <a:bodyPr/>
                     <a:lstStyle/>
                     <a:p>
-                      <a:pPr algn="ctr" indent="0" marL="0">
+                      <a:pPr marL="0" indent="0" algn="ctr">
                         <a:buNone/>
                       </a:pPr>
                       <a:r>
@@ -12258,7 +12522,7 @@
                       </a:endParaRPr>
                     </a:p>
                   </a:txBody>
-                  <a:tcPr marL="91440" marR="91440" marT="45720" marB="45720" anchor="ctr">
+                  <a:tcPr anchor="ctr">
                     <a:lnL w="6350" cap="flat" cmpd="sng" algn="ctr">
                       <a:solidFill>
                         <a:srgbClr val="E6E5E0"/>
@@ -12297,6 +12561,11 @@
                     </a:lnB>
                   </a:tcPr>
                 </a:tc>
+                <a:extLst>
+                  <a:ext uri="{0D108BD9-81ED-4DB2-BD59-A6C34878D82A}">
+                    <a16:rowId xmlns:a16="http://schemas.microsoft.com/office/drawing/2014/main" val="10003"/>
+                  </a:ext>
+                </a:extLst>
               </a:tr>
             </a:tbl>
           </a:graphicData>
@@ -12321,10 +12590,17 @@
           </a:solidFill>
           <a:ln/>
         </p:spPr>
-      </p:sp>
-      <p:sp>
-        <p:nvSpPr>
-          <p:cNvPr id="8" name="Shape 5"/>
+        <p:txBody>
+          <a:bodyPr/>
+          <a:lstStyle/>
+          <a:p>
+            <a:endParaRPr lang="en-AU"/>
+          </a:p>
+        </p:txBody>
+      </p:sp>
+      <p:sp>
+        <p:nvSpPr>
+          <p:cNvPr id="6" name="Shape 5"/>
           <p:cNvSpPr/>
           <p:nvPr/>
         </p:nvSpPr>
@@ -12341,6 +12617,13 @@
           </a:solidFill>
           <a:ln/>
         </p:spPr>
+        <p:txBody>
+          <a:bodyPr/>
+          <a:lstStyle/>
+          <a:p>
+            <a:endParaRPr lang="en-AU"/>
+          </a:p>
+        </p:txBody>
       </p:sp>
       <p:sp>
         <p:nvSpPr>
@@ -12363,11 +12646,11 @@
           <a:bodyPr wrap="square" lIns="0" tIns="0" rIns="0" bIns="0" rtlCol="0" anchor="t"/>
           <a:lstStyle/>
           <a:p>
-            <a:pPr algn="l" indent="0" marL="0">
-              <a:buNone/>
-            </a:pPr>
-            <a:r>
-              <a:rPr lang="en-US" sz="1100" b="1" spc="100" kern="0" dirty="0">
+            <a:pPr marL="0" indent="0" algn="l">
+              <a:buNone/>
+            </a:pPr>
+            <a:r>
+              <a:rPr lang="en-US" sz="1100" b="1" kern="0" spc="100" dirty="0">
                 <a:solidFill>
                   <a:srgbClr val="D97757"/>
                 </a:solidFill>
@@ -12402,7 +12685,7 @@
           <a:bodyPr wrap="square" lIns="0" tIns="0" rIns="0" bIns="0" rtlCol="0" anchor="t"/>
           <a:lstStyle/>
           <a:p>
-            <a:pPr algn="l" indent="0" marL="0">
+            <a:pPr marL="0" indent="0" algn="l">
               <a:buNone/>
             </a:pPr>
             <a:r>
@@ -12439,6 +12722,13 @@
           </a:solidFill>
           <a:ln/>
         </p:spPr>
+        <p:txBody>
+          <a:bodyPr/>
+          <a:lstStyle/>
+          <a:p>
+            <a:endParaRPr lang="en-AU"/>
+          </a:p>
+        </p:txBody>
       </p:sp>
       <p:sp>
         <p:nvSpPr>
@@ -12461,7 +12751,7 @@
           <a:bodyPr wrap="square" lIns="0" tIns="0" rIns="0" bIns="0" rtlCol="0" anchor="ctr"/>
           <a:lstStyle/>
           <a:p>
-            <a:pPr algn="l" indent="0" marL="0">
+            <a:pPr marL="0" indent="0" algn="l">
               <a:buNone/>
             </a:pPr>
             <a:r>
@@ -12500,7 +12790,7 @@
           <a:bodyPr wrap="square" lIns="0" tIns="0" rIns="0" bIns="0" rtlCol="0" anchor="ctr"/>
           <a:lstStyle/>
           <a:p>
-            <a:pPr algn="r" indent="0" marL="0">
+            <a:pPr marL="0" indent="0" algn="r">
               <a:buNone/>
             </a:pPr>
             <a:r>
@@ -12534,6 +12824,7 @@
         <a:solidFill>
           <a:srgbClr val="FFFFFF"/>
         </a:solidFill>
+        <a:effectLst/>
       </p:bgPr>
     </p:bg>
     <p:spTree>
@@ -12569,6 +12860,13 @@
           </a:solidFill>
           <a:ln/>
         </p:spPr>
+        <p:txBody>
+          <a:bodyPr/>
+          <a:lstStyle/>
+          <a:p>
+            <a:endParaRPr lang="en-AU"/>
+          </a:p>
+        </p:txBody>
       </p:sp>
       <p:sp>
         <p:nvSpPr>
@@ -12591,11 +12889,11 @@
           <a:bodyPr wrap="square" lIns="0" tIns="0" rIns="0" bIns="0" rtlCol="0" anchor="ctr"/>
           <a:lstStyle/>
           <a:p>
-            <a:pPr algn="l" indent="0" marL="0">
-              <a:buNone/>
-            </a:pPr>
-            <a:r>
-              <a:rPr lang="en-US" sz="1000" b="1" spc="200" kern="0" dirty="0">
+            <a:pPr marL="0" indent="0" algn="l">
+              <a:buNone/>
+            </a:pPr>
+            <a:r>
+              <a:rPr lang="en-US" sz="1000" b="1" kern="0" spc="200" dirty="0">
                 <a:solidFill>
                   <a:srgbClr val="D97757"/>
                 </a:solidFill>
@@ -12630,7 +12928,7 @@
           <a:bodyPr wrap="square" lIns="0" tIns="0" rIns="0" bIns="0" rtlCol="0" anchor="ctr"/>
           <a:lstStyle/>
           <a:p>
-            <a:pPr algn="l" indent="0" marL="0">
+            <a:pPr marL="0" indent="0" algn="l">
               <a:buNone/>
             </a:pPr>
             <a:r>
@@ -12670,6 +12968,13 @@
             <a:prstDash val="solid"/>
           </a:ln>
         </p:spPr>
+        <p:txBody>
+          <a:bodyPr/>
+          <a:lstStyle/>
+          <a:p>
+            <a:endParaRPr lang="en-AU"/>
+          </a:p>
+        </p:txBody>
       </p:sp>
       <p:sp>
         <p:nvSpPr>
@@ -12692,7 +12997,7 @@
           <a:bodyPr wrap="square" lIns="0" tIns="0" rIns="0" bIns="0" rtlCol="0" anchor="t"/>
           <a:lstStyle/>
           <a:p>
-            <a:pPr algn="l" indent="0" marL="0">
+            <a:pPr marL="0" indent="0" algn="l">
               <a:buNone/>
             </a:pPr>
             <a:r>
@@ -12734,6 +13039,13 @@
             <a:prstDash val="solid"/>
           </a:ln>
         </p:spPr>
+        <p:txBody>
+          <a:bodyPr/>
+          <a:lstStyle/>
+          <a:p>
+            <a:endParaRPr lang="en-AU"/>
+          </a:p>
+        </p:txBody>
       </p:sp>
       <p:sp>
         <p:nvSpPr>
@@ -12754,6 +13066,13 @@
           </a:solidFill>
           <a:ln/>
         </p:spPr>
+        <p:txBody>
+          <a:bodyPr/>
+          <a:lstStyle/>
+          <a:p>
+            <a:endParaRPr lang="en-AU"/>
+          </a:p>
+        </p:txBody>
       </p:sp>
       <p:sp>
         <p:nvSpPr>
@@ -12776,7 +13095,7 @@
           <a:bodyPr wrap="square" lIns="0" tIns="0" rIns="0" bIns="0" rtlCol="0" anchor="ctr"/>
           <a:lstStyle/>
           <a:p>
-            <a:pPr algn="l" indent="0" marL="0">
+            <a:pPr marL="0" indent="0" algn="l">
               <a:buNone/>
             </a:pPr>
             <a:r>
@@ -12815,7 +13134,7 @@
           <a:bodyPr wrap="square" lIns="0" tIns="0" rIns="0" bIns="0" rtlCol="0" anchor="ctr"/>
           <a:lstStyle/>
           <a:p>
-            <a:pPr algn="l" indent="0" marL="0">
+            <a:pPr marL="0" indent="0" algn="l">
               <a:buNone/>
             </a:pPr>
             <a:r>
@@ -12854,7 +13173,7 @@
           <a:bodyPr wrap="square" lIns="0" tIns="0" rIns="0" bIns="0" rtlCol="0" anchor="ctr"/>
           <a:lstStyle/>
           <a:p>
-            <a:pPr algn="r" indent="0" marL="0">
+            <a:pPr marL="0" indent="0" algn="r">
               <a:buNone/>
             </a:pPr>
             <a:r>
@@ -12893,7 +13212,7 @@
           <a:bodyPr wrap="square" lIns="0" tIns="0" rIns="0" bIns="0" rtlCol="0" anchor="ctr"/>
           <a:lstStyle/>
           <a:p>
-            <a:pPr algn="l" indent="0" marL="0">
+            <a:pPr marL="0" indent="0" algn="l">
               <a:buNone/>
             </a:pPr>
             <a:r>
@@ -12932,7 +13251,7 @@
           <a:bodyPr wrap="square" lIns="0" tIns="0" rIns="0" bIns="0" rtlCol="0" anchor="ctr"/>
           <a:lstStyle/>
           <a:p>
-            <a:pPr algn="r" indent="0" marL="0">
+            <a:pPr marL="0" indent="0" algn="r">
               <a:buNone/>
             </a:pPr>
             <a:r>
@@ -12971,7 +13290,7 @@
           <a:bodyPr wrap="square" lIns="0" tIns="0" rIns="0" bIns="0" rtlCol="0" anchor="ctr"/>
           <a:lstStyle/>
           <a:p>
-            <a:pPr algn="l" indent="0" marL="0">
+            <a:pPr marL="0" indent="0" algn="l">
               <a:buNone/>
             </a:pPr>
             <a:r>
@@ -13010,7 +13329,7 @@
           <a:bodyPr wrap="square" lIns="0" tIns="0" rIns="0" bIns="0" rtlCol="0" anchor="ctr"/>
           <a:lstStyle/>
           <a:p>
-            <a:pPr algn="r" indent="0" marL="0">
+            <a:pPr marL="0" indent="0" algn="r">
               <a:buNone/>
             </a:pPr>
             <a:r>
@@ -13049,7 +13368,7 @@
           <a:bodyPr wrap="square" lIns="0" tIns="0" rIns="0" bIns="0" rtlCol="0" anchor="ctr"/>
           <a:lstStyle/>
           <a:p>
-            <a:pPr algn="l" indent="0" marL="0">
+            <a:pPr marL="0" indent="0" algn="l">
               <a:buNone/>
             </a:pPr>
             <a:r>
@@ -13088,7 +13407,7 @@
           <a:bodyPr wrap="square" lIns="0" tIns="0" rIns="0" bIns="0" rtlCol="0" anchor="ctr"/>
           <a:lstStyle/>
           <a:p>
-            <a:pPr algn="r" indent="0" marL="0">
+            <a:pPr marL="0" indent="0" algn="r">
               <a:buNone/>
             </a:pPr>
             <a:r>
@@ -13127,7 +13446,7 @@
           <a:bodyPr wrap="square" lIns="0" tIns="0" rIns="0" bIns="0" rtlCol="0" anchor="t"/>
           <a:lstStyle/>
           <a:p>
-            <a:pPr algn="l" indent="0" marL="0">
+            <a:pPr marL="0" indent="0" algn="l">
               <a:buNone/>
             </a:pPr>
             <a:r>
@@ -13169,6 +13488,13 @@
             <a:prstDash val="solid"/>
           </a:ln>
         </p:spPr>
+        <p:txBody>
+          <a:bodyPr/>
+          <a:lstStyle/>
+          <a:p>
+            <a:endParaRPr lang="en-AU"/>
+          </a:p>
+        </p:txBody>
       </p:sp>
       <p:sp>
         <p:nvSpPr>
@@ -13189,6 +13515,13 @@
           </a:solidFill>
           <a:ln/>
         </p:spPr>
+        <p:txBody>
+          <a:bodyPr/>
+          <a:lstStyle/>
+          <a:p>
+            <a:endParaRPr lang="en-AU"/>
+          </a:p>
+        </p:txBody>
       </p:sp>
       <p:sp>
         <p:nvSpPr>
@@ -13211,7 +13544,7 @@
           <a:bodyPr wrap="square" lIns="0" tIns="0" rIns="0" bIns="0" rtlCol="0" anchor="ctr"/>
           <a:lstStyle/>
           <a:p>
-            <a:pPr algn="l" indent="0" marL="0">
+            <a:pPr marL="0" indent="0" algn="l">
               <a:buNone/>
             </a:pPr>
             <a:r>
@@ -13250,7 +13583,7 @@
           <a:bodyPr wrap="square" lIns="0" tIns="0" rIns="0" bIns="0" rtlCol="0" anchor="ctr"/>
           <a:lstStyle/>
           <a:p>
-            <a:pPr algn="l" indent="0" marL="0">
+            <a:pPr marL="0" indent="0" algn="l">
               <a:buNone/>
             </a:pPr>
             <a:r>
@@ -13289,7 +13622,7 @@
           <a:bodyPr wrap="square" lIns="0" tIns="0" rIns="0" bIns="0" rtlCol="0" anchor="ctr"/>
           <a:lstStyle/>
           <a:p>
-            <a:pPr algn="r" indent="0" marL="0">
+            <a:pPr marL="0" indent="0" algn="r">
               <a:buNone/>
             </a:pPr>
             <a:r>
@@ -13328,7 +13661,7 @@
           <a:bodyPr wrap="square" lIns="0" tIns="0" rIns="0" bIns="0" rtlCol="0" anchor="ctr"/>
           <a:lstStyle/>
           <a:p>
-            <a:pPr algn="l" indent="0" marL="0">
+            <a:pPr marL="0" indent="0" algn="l">
               <a:buNone/>
             </a:pPr>
             <a:r>
@@ -13367,7 +13700,7 @@
           <a:bodyPr wrap="square" lIns="0" tIns="0" rIns="0" bIns="0" rtlCol="0" anchor="ctr"/>
           <a:lstStyle/>
           <a:p>
-            <a:pPr algn="r" indent="0" marL="0">
+            <a:pPr marL="0" indent="0" algn="r">
               <a:buNone/>
             </a:pPr>
             <a:r>
@@ -13406,7 +13739,7 @@
           <a:bodyPr wrap="square" lIns="0" tIns="0" rIns="0" bIns="0" rtlCol="0" anchor="ctr"/>
           <a:lstStyle/>
           <a:p>
-            <a:pPr algn="l" indent="0" marL="0">
+            <a:pPr marL="0" indent="0" algn="l">
               <a:buNone/>
             </a:pPr>
             <a:r>
@@ -13445,7 +13778,7 @@
           <a:bodyPr wrap="square" lIns="0" tIns="0" rIns="0" bIns="0" rtlCol="0" anchor="ctr"/>
           <a:lstStyle/>
           <a:p>
-            <a:pPr algn="r" indent="0" marL="0">
+            <a:pPr marL="0" indent="0" algn="r">
               <a:buNone/>
             </a:pPr>
             <a:r>
@@ -13484,7 +13817,7 @@
           <a:bodyPr wrap="square" lIns="0" tIns="0" rIns="0" bIns="0" rtlCol="0" anchor="ctr"/>
           <a:lstStyle/>
           <a:p>
-            <a:pPr algn="l" indent="0" marL="0">
+            <a:pPr marL="0" indent="0" algn="l">
               <a:buNone/>
             </a:pPr>
             <a:r>
@@ -13523,7 +13856,7 @@
           <a:bodyPr wrap="square" lIns="0" tIns="0" rIns="0" bIns="0" rtlCol="0" anchor="ctr"/>
           <a:lstStyle/>
           <a:p>
-            <a:pPr algn="r" indent="0" marL="0">
+            <a:pPr marL="0" indent="0" algn="r">
               <a:buNone/>
             </a:pPr>
             <a:r>
@@ -13562,7 +13895,7 @@
           <a:bodyPr wrap="square" lIns="0" tIns="0" rIns="0" bIns="0" rtlCol="0" anchor="t"/>
           <a:lstStyle/>
           <a:p>
-            <a:pPr algn="l" indent="0" marL="0">
+            <a:pPr marL="0" indent="0" algn="l">
               <a:buNone/>
             </a:pPr>
             <a:r>
@@ -13604,6 +13937,13 @@
             <a:prstDash val="solid"/>
           </a:ln>
         </p:spPr>
+        <p:txBody>
+          <a:bodyPr/>
+          <a:lstStyle/>
+          <a:p>
+            <a:endParaRPr lang="en-AU"/>
+          </a:p>
+        </p:txBody>
       </p:sp>
       <p:sp>
         <p:nvSpPr>
@@ -13624,6 +13964,13 @@
           </a:solidFill>
           <a:ln/>
         </p:spPr>
+        <p:txBody>
+          <a:bodyPr/>
+          <a:lstStyle/>
+          <a:p>
+            <a:endParaRPr lang="en-AU"/>
+          </a:p>
+        </p:txBody>
       </p:sp>
       <p:sp>
         <p:nvSpPr>
@@ -13646,7 +13993,7 @@
           <a:bodyPr wrap="square" lIns="0" tIns="0" rIns="0" bIns="0" rtlCol="0" anchor="ctr"/>
           <a:lstStyle/>
           <a:p>
-            <a:pPr algn="l" indent="0" marL="0">
+            <a:pPr marL="0" indent="0" algn="l">
               <a:buNone/>
             </a:pPr>
             <a:r>
@@ -13685,7 +14032,7 @@
           <a:bodyPr wrap="square" lIns="0" tIns="0" rIns="0" bIns="0" rtlCol="0" anchor="ctr"/>
           <a:lstStyle/>
           <a:p>
-            <a:pPr algn="l" indent="0" marL="0">
+            <a:pPr marL="0" indent="0" algn="l">
               <a:buNone/>
             </a:pPr>
             <a:r>
@@ -13724,7 +14071,7 @@
           <a:bodyPr wrap="square" lIns="0" tIns="0" rIns="0" bIns="0" rtlCol="0" anchor="ctr"/>
           <a:lstStyle/>
           <a:p>
-            <a:pPr algn="r" indent="0" marL="0">
+            <a:pPr marL="0" indent="0" algn="r">
               <a:buNone/>
             </a:pPr>
             <a:r>
@@ -13763,7 +14110,7 @@
           <a:bodyPr wrap="square" lIns="0" tIns="0" rIns="0" bIns="0" rtlCol="0" anchor="ctr"/>
           <a:lstStyle/>
           <a:p>
-            <a:pPr algn="l" indent="0" marL="0">
+            <a:pPr marL="0" indent="0" algn="l">
               <a:buNone/>
             </a:pPr>
             <a:r>
@@ -13802,7 +14149,7 @@
           <a:bodyPr wrap="square" lIns="0" tIns="0" rIns="0" bIns="0" rtlCol="0" anchor="ctr"/>
           <a:lstStyle/>
           <a:p>
-            <a:pPr algn="r" indent="0" marL="0">
+            <a:pPr marL="0" indent="0" algn="r">
               <a:buNone/>
             </a:pPr>
             <a:r>
@@ -13841,7 +14188,7 @@
           <a:bodyPr wrap="square" lIns="0" tIns="0" rIns="0" bIns="0" rtlCol="0" anchor="ctr"/>
           <a:lstStyle/>
           <a:p>
-            <a:pPr algn="l" indent="0" marL="0">
+            <a:pPr marL="0" indent="0" algn="l">
               <a:buNone/>
             </a:pPr>
             <a:r>
@@ -13880,7 +14227,7 @@
           <a:bodyPr wrap="square" lIns="0" tIns="0" rIns="0" bIns="0" rtlCol="0" anchor="ctr"/>
           <a:lstStyle/>
           <a:p>
-            <a:pPr algn="r" indent="0" marL="0">
+            <a:pPr marL="0" indent="0" algn="r">
               <a:buNone/>
             </a:pPr>
             <a:r>
@@ -13919,7 +14266,7 @@
           <a:bodyPr wrap="square" lIns="0" tIns="0" rIns="0" bIns="0" rtlCol="0" anchor="ctr"/>
           <a:lstStyle/>
           <a:p>
-            <a:pPr algn="l" indent="0" marL="0">
+            <a:pPr marL="0" indent="0" algn="l">
               <a:buNone/>
             </a:pPr>
             <a:r>
@@ -13958,7 +14305,7 @@
           <a:bodyPr wrap="square" lIns="0" tIns="0" rIns="0" bIns="0" rtlCol="0" anchor="ctr"/>
           <a:lstStyle/>
           <a:p>
-            <a:pPr algn="r" indent="0" marL="0">
+            <a:pPr marL="0" indent="0" algn="r">
               <a:buNone/>
             </a:pPr>
             <a:r>
@@ -13997,7 +14344,7 @@
           <a:bodyPr wrap="square" lIns="0" tIns="0" rIns="0" bIns="0" rtlCol="0" anchor="t"/>
           <a:lstStyle/>
           <a:p>
-            <a:pPr algn="l" indent="0" marL="0">
+            <a:pPr marL="0" indent="0" algn="l">
               <a:buNone/>
             </a:pPr>
             <a:r>
@@ -14036,7 +14383,7 @@
           <a:bodyPr wrap="square" lIns="0" tIns="0" rIns="0" bIns="0" rtlCol="0" anchor="ctr"/>
           <a:lstStyle/>
           <a:p>
-            <a:pPr algn="l" indent="0" marL="0">
+            <a:pPr marL="0" indent="0" algn="l">
               <a:buNone/>
             </a:pPr>
             <a:r>
@@ -14073,6 +14420,13 @@
           </a:solidFill>
           <a:ln/>
         </p:spPr>
+        <p:txBody>
+          <a:bodyPr/>
+          <a:lstStyle/>
+          <a:p>
+            <a:endParaRPr lang="en-AU"/>
+          </a:p>
+        </p:txBody>
       </p:sp>
       <p:sp>
         <p:nvSpPr>
@@ -14095,7 +14449,7 @@
           <a:bodyPr wrap="square" lIns="0" tIns="0" rIns="0" bIns="0" rtlCol="0" anchor="ctr"/>
           <a:lstStyle/>
           <a:p>
-            <a:pPr algn="l" indent="0" marL="0">
+            <a:pPr marL="0" indent="0" algn="l">
               <a:buNone/>
             </a:pPr>
             <a:r>
@@ -14134,7 +14488,7 @@
           <a:bodyPr wrap="square" lIns="0" tIns="0" rIns="0" bIns="0" rtlCol="0" anchor="ctr"/>
           <a:lstStyle/>
           <a:p>
-            <a:pPr algn="r" indent="0" marL="0">
+            <a:pPr marL="0" indent="0" algn="r">
               <a:buNone/>
             </a:pPr>
             <a:r>
@@ -14168,6 +14522,7 @@
         <a:solidFill>
           <a:srgbClr val="FFFFFF"/>
         </a:solidFill>
+        <a:effectLst/>
       </p:bgPr>
     </p:bg>
     <p:spTree>
@@ -14203,6 +14558,13 @@
           </a:solidFill>
           <a:ln/>
         </p:spPr>
+        <p:txBody>
+          <a:bodyPr/>
+          <a:lstStyle/>
+          <a:p>
+            <a:endParaRPr lang="en-AU"/>
+          </a:p>
+        </p:txBody>
       </p:sp>
       <p:sp>
         <p:nvSpPr>
@@ -14225,11 +14587,11 @@
           <a:bodyPr wrap="square" lIns="0" tIns="0" rIns="0" bIns="0" rtlCol="0" anchor="ctr"/>
           <a:lstStyle/>
           <a:p>
-            <a:pPr algn="l" indent="0" marL="0">
-              <a:buNone/>
-            </a:pPr>
-            <a:r>
-              <a:rPr lang="en-US" sz="1000" b="1" spc="200" kern="0" dirty="0">
+            <a:pPr marL="0" indent="0" algn="l">
+              <a:buNone/>
+            </a:pPr>
+            <a:r>
+              <a:rPr lang="en-US" sz="1000" b="1" kern="0" spc="200" dirty="0">
                 <a:solidFill>
                   <a:srgbClr val="D97757"/>
                 </a:solidFill>
@@ -14264,7 +14626,7 @@
           <a:bodyPr wrap="square" lIns="0" tIns="0" rIns="0" bIns="0" rtlCol="0" anchor="ctr"/>
           <a:lstStyle/>
           <a:p>
-            <a:pPr algn="l" indent="0" marL="0">
+            <a:pPr marL="0" indent="0" algn="l">
               <a:buNone/>
             </a:pPr>
             <a:r>
@@ -14304,6 +14666,13 @@
             <a:prstDash val="solid"/>
           </a:ln>
         </p:spPr>
+        <p:txBody>
+          <a:bodyPr/>
+          <a:lstStyle/>
+          <a:p>
+            <a:endParaRPr lang="en-AU"/>
+          </a:p>
+        </p:txBody>
       </p:sp>
       <p:sp>
         <p:nvSpPr>
@@ -14329,6 +14698,13 @@
             <a:prstDash val="solid"/>
           </a:ln>
         </p:spPr>
+        <p:txBody>
+          <a:bodyPr/>
+          <a:lstStyle/>
+          <a:p>
+            <a:endParaRPr lang="en-AU"/>
+          </a:p>
+        </p:txBody>
       </p:sp>
       <p:sp>
         <p:nvSpPr>
@@ -14349,6 +14725,13 @@
           </a:solidFill>
           <a:ln/>
         </p:spPr>
+        <p:txBody>
+          <a:bodyPr/>
+          <a:lstStyle/>
+          <a:p>
+            <a:endParaRPr lang="en-AU"/>
+          </a:p>
+        </p:txBody>
       </p:sp>
       <p:sp>
         <p:nvSpPr>
@@ -14371,11 +14754,11 @@
           <a:bodyPr wrap="square" lIns="0" tIns="0" rIns="0" bIns="0" rtlCol="0" anchor="t"/>
           <a:lstStyle/>
           <a:p>
-            <a:pPr algn="l" indent="0" marL="0">
-              <a:buNone/>
-            </a:pPr>
-            <a:r>
-              <a:rPr lang="en-US" sz="1100" b="1" spc="100" kern="0" dirty="0">
+            <a:pPr marL="0" indent="0" algn="l">
+              <a:buNone/>
+            </a:pPr>
+            <a:r>
+              <a:rPr lang="en-US" sz="1100" b="1" kern="0" spc="100" dirty="0">
                 <a:solidFill>
                   <a:srgbClr val="D97757"/>
                 </a:solidFill>
@@ -14410,7 +14793,7 @@
           <a:bodyPr wrap="square" lIns="0" tIns="0" rIns="0" bIns="0" rtlCol="0" anchor="t"/>
           <a:lstStyle/>
           <a:p>
-            <a:pPr algn="l" indent="0" marL="0">
+            <a:pPr marL="0" indent="0" algn="l">
               <a:buNone/>
             </a:pPr>
             <a:r>
@@ -14449,7 +14832,7 @@
           <a:bodyPr wrap="square" lIns="0" tIns="0" rIns="0" bIns="0" rtlCol="0" anchor="t"/>
           <a:lstStyle/>
           <a:p>
-            <a:pPr algn="l" indent="0" marL="0">
+            <a:pPr marL="0" indent="0" algn="l">
               <a:buNone/>
             </a:pPr>
             <a:r>
@@ -14488,7 +14871,7 @@
           <a:bodyPr wrap="square" lIns="0" tIns="0" rIns="0" bIns="0" rtlCol="0" anchor="t"/>
           <a:lstStyle/>
           <a:p>
-            <a:pPr algn="l" indent="0" marL="0">
+            <a:pPr marL="0" indent="0" algn="l">
               <a:buNone/>
             </a:pPr>
             <a:r>
@@ -14530,6 +14913,13 @@
             <a:prstDash val="solid"/>
           </a:ln>
         </p:spPr>
+        <p:txBody>
+          <a:bodyPr/>
+          <a:lstStyle/>
+          <a:p>
+            <a:endParaRPr lang="en-AU"/>
+          </a:p>
+        </p:txBody>
       </p:sp>
       <p:sp>
         <p:nvSpPr>
@@ -14550,6 +14940,13 @@
           </a:solidFill>
           <a:ln/>
         </p:spPr>
+        <p:txBody>
+          <a:bodyPr/>
+          <a:lstStyle/>
+          <a:p>
+            <a:endParaRPr lang="en-AU"/>
+          </a:p>
+        </p:txBody>
       </p:sp>
       <p:sp>
         <p:nvSpPr>
@@ -14572,11 +14969,11 @@
           <a:bodyPr wrap="square" lIns="0" tIns="0" rIns="0" bIns="0" rtlCol="0" anchor="t"/>
           <a:lstStyle/>
           <a:p>
-            <a:pPr algn="l" indent="0" marL="0">
-              <a:buNone/>
-            </a:pPr>
-            <a:r>
-              <a:rPr lang="en-US" sz="1100" b="1" spc="100" kern="0" dirty="0">
+            <a:pPr marL="0" indent="0" algn="l">
+              <a:buNone/>
+            </a:pPr>
+            <a:r>
+              <a:rPr lang="en-US" sz="1100" b="1" kern="0" spc="100" dirty="0">
                 <a:solidFill>
                   <a:srgbClr val="D97757"/>
                 </a:solidFill>
@@ -14611,7 +15008,7 @@
           <a:bodyPr wrap="square" lIns="0" tIns="0" rIns="0" bIns="0" rtlCol="0" anchor="t"/>
           <a:lstStyle/>
           <a:p>
-            <a:pPr algn="l" indent="0" marL="0">
+            <a:pPr marL="0" indent="0" algn="l">
               <a:buNone/>
             </a:pPr>
             <a:r>
@@ -14650,7 +15047,7 @@
           <a:bodyPr wrap="square" lIns="0" tIns="0" rIns="0" bIns="0" rtlCol="0" anchor="t"/>
           <a:lstStyle/>
           <a:p>
-            <a:pPr algn="l" indent="0" marL="0">
+            <a:pPr marL="0" indent="0" algn="l">
               <a:buNone/>
             </a:pPr>
             <a:r>
@@ -14689,7 +15086,7 @@
           <a:bodyPr wrap="square" lIns="0" tIns="0" rIns="0" bIns="0" rtlCol="0" anchor="t"/>
           <a:lstStyle/>
           <a:p>
-            <a:pPr algn="l" indent="0" marL="0">
+            <a:pPr marL="0" indent="0" algn="l">
               <a:buNone/>
             </a:pPr>
             <a:r>
@@ -14731,6 +15128,13 @@
             <a:prstDash val="solid"/>
           </a:ln>
         </p:spPr>
+        <p:txBody>
+          <a:bodyPr/>
+          <a:lstStyle/>
+          <a:p>
+            <a:endParaRPr lang="en-AU"/>
+          </a:p>
+        </p:txBody>
       </p:sp>
       <p:sp>
         <p:nvSpPr>
@@ -14751,6 +15155,13 @@
           </a:solidFill>
           <a:ln/>
         </p:spPr>
+        <p:txBody>
+          <a:bodyPr/>
+          <a:lstStyle/>
+          <a:p>
+            <a:endParaRPr lang="en-AU"/>
+          </a:p>
+        </p:txBody>
       </p:sp>
       <p:sp>
         <p:nvSpPr>
@@ -14773,11 +15184,11 @@
           <a:bodyPr wrap="square" lIns="0" tIns="0" rIns="0" bIns="0" rtlCol="0" anchor="t"/>
           <a:lstStyle/>
           <a:p>
-            <a:pPr algn="l" indent="0" marL="0">
-              <a:buNone/>
-            </a:pPr>
-            <a:r>
-              <a:rPr lang="en-US" sz="1100" b="1" spc="100" kern="0" dirty="0">
+            <a:pPr marL="0" indent="0" algn="l">
+              <a:buNone/>
+            </a:pPr>
+            <a:r>
+              <a:rPr lang="en-US" sz="1100" b="1" kern="0" spc="100" dirty="0">
                 <a:solidFill>
                   <a:srgbClr val="D97757"/>
                 </a:solidFill>
@@ -14812,7 +15223,7 @@
           <a:bodyPr wrap="square" lIns="0" tIns="0" rIns="0" bIns="0" rtlCol="0" anchor="t"/>
           <a:lstStyle/>
           <a:p>
-            <a:pPr algn="l" indent="0" marL="0">
+            <a:pPr marL="0" indent="0" algn="l">
               <a:buNone/>
             </a:pPr>
             <a:r>
@@ -14851,7 +15262,7 @@
           <a:bodyPr wrap="square" lIns="0" tIns="0" rIns="0" bIns="0" rtlCol="0" anchor="t"/>
           <a:lstStyle/>
           <a:p>
-            <a:pPr algn="l" indent="0" marL="0">
+            <a:pPr marL="0" indent="0" algn="l">
               <a:buNone/>
             </a:pPr>
             <a:r>
@@ -14890,7 +15301,7 @@
           <a:bodyPr wrap="square" lIns="0" tIns="0" rIns="0" bIns="0" rtlCol="0" anchor="t"/>
           <a:lstStyle/>
           <a:p>
-            <a:pPr algn="l" indent="0" marL="0">
+            <a:pPr marL="0" indent="0" algn="l">
               <a:buNone/>
             </a:pPr>
             <a:r>
@@ -14932,6 +15343,13 @@
             <a:prstDash val="solid"/>
           </a:ln>
         </p:spPr>
+        <p:txBody>
+          <a:bodyPr/>
+          <a:lstStyle/>
+          <a:p>
+            <a:endParaRPr lang="en-AU"/>
+          </a:p>
+        </p:txBody>
       </p:sp>
       <p:sp>
         <p:nvSpPr>
@@ -14952,6 +15370,13 @@
           </a:solidFill>
           <a:ln/>
         </p:spPr>
+        <p:txBody>
+          <a:bodyPr/>
+          <a:lstStyle/>
+          <a:p>
+            <a:endParaRPr lang="en-AU"/>
+          </a:p>
+        </p:txBody>
       </p:sp>
       <p:sp>
         <p:nvSpPr>
@@ -14974,11 +15399,11 @@
           <a:bodyPr wrap="square" lIns="0" tIns="0" rIns="0" bIns="0" rtlCol="0" anchor="t"/>
           <a:lstStyle/>
           <a:p>
-            <a:pPr algn="l" indent="0" marL="0">
-              <a:buNone/>
-            </a:pPr>
-            <a:r>
-              <a:rPr lang="en-US" sz="1100" b="1" spc="100" kern="0" dirty="0">
+            <a:pPr marL="0" indent="0" algn="l">
+              <a:buNone/>
+            </a:pPr>
+            <a:r>
+              <a:rPr lang="en-US" sz="1100" b="1" kern="0" spc="100" dirty="0">
                 <a:solidFill>
                   <a:srgbClr val="D97757"/>
                 </a:solidFill>
@@ -15013,7 +15438,7 @@
           <a:bodyPr wrap="square" lIns="0" tIns="0" rIns="0" bIns="0" rtlCol="0" anchor="t"/>
           <a:lstStyle/>
           <a:p>
-            <a:pPr algn="l" indent="0" marL="0">
+            <a:pPr marL="0" indent="0" algn="l">
               <a:buNone/>
             </a:pPr>
             <a:r>
@@ -15052,7 +15477,7 @@
           <a:bodyPr wrap="square" lIns="0" tIns="0" rIns="0" bIns="0" rtlCol="0" anchor="t"/>
           <a:lstStyle/>
           <a:p>
-            <a:pPr algn="l" indent="0" marL="0">
+            <a:pPr marL="0" indent="0" algn="l">
               <a:buNone/>
             </a:pPr>
             <a:r>
@@ -15091,7 +15516,7 @@
           <a:bodyPr wrap="square" lIns="0" tIns="0" rIns="0" bIns="0" rtlCol="0" anchor="t"/>
           <a:lstStyle/>
           <a:p>
-            <a:pPr algn="l" indent="0" marL="0">
+            <a:pPr marL="0" indent="0" algn="l">
               <a:buNone/>
             </a:pPr>
             <a:r>
@@ -15128,6 +15553,13 @@
           </a:solidFill>
           <a:ln/>
         </p:spPr>
+        <p:txBody>
+          <a:bodyPr/>
+          <a:lstStyle/>
+          <a:p>
+            <a:endParaRPr lang="en-AU"/>
+          </a:p>
+        </p:txBody>
       </p:sp>
       <p:sp>
         <p:nvSpPr>
@@ -15150,7 +15582,7 @@
           <a:bodyPr wrap="square" lIns="0" tIns="0" rIns="0" bIns="0" rtlCol="0" anchor="ctr"/>
           <a:lstStyle/>
           <a:p>
-            <a:pPr algn="l" indent="0" marL="0">
+            <a:pPr marL="0" indent="0" algn="l">
               <a:buNone/>
             </a:pPr>
             <a:r>
@@ -15189,7 +15621,7 @@
           <a:bodyPr wrap="square" lIns="0" tIns="0" rIns="0" bIns="0" rtlCol="0" anchor="ctr"/>
           <a:lstStyle/>
           <a:p>
-            <a:pPr algn="r" indent="0" marL="0">
+            <a:pPr marL="0" indent="0" algn="r">
               <a:buNone/>
             </a:pPr>
             <a:r>
@@ -15508,4 +15940,319 @@
     </a:ext>
   </a:extLst>
 </a:theme>
+</file>
+
+<file path=ppt/theme/theme2.xml><?xml version="1.0" encoding="utf-8"?>
+<a:theme xmlns:a="http://schemas.openxmlformats.org/drawingml/2006/main" name="Office Theme">
+  <a:themeElements>
+    <a:clrScheme name="Office">
+      <a:dk1>
+        <a:sysClr val="windowText" lastClr="000000"/>
+      </a:dk1>
+      <a:lt1>
+        <a:sysClr val="window" lastClr="FFFFFF"/>
+      </a:lt1>
+      <a:dk2>
+        <a:srgbClr val="0E2841"/>
+      </a:dk2>
+      <a:lt2>
+        <a:srgbClr val="E8E8E8"/>
+      </a:lt2>
+      <a:accent1>
+        <a:srgbClr val="156082"/>
+      </a:accent1>
+      <a:accent2>
+        <a:srgbClr val="E97132"/>
+      </a:accent2>
+      <a:accent3>
+        <a:srgbClr val="196B24"/>
+      </a:accent3>
+      <a:accent4>
+        <a:srgbClr val="0F9ED5"/>
+      </a:accent4>
+      <a:accent5>
+        <a:srgbClr val="A02B93"/>
+      </a:accent5>
+      <a:accent6>
+        <a:srgbClr val="4EA72E"/>
+      </a:accent6>
+      <a:hlink>
+        <a:srgbClr val="467886"/>
+      </a:hlink>
+      <a:folHlink>
+        <a:srgbClr val="96607D"/>
+      </a:folHlink>
+    </a:clrScheme>
+    <a:fontScheme name="Office">
+      <a:majorFont>
+        <a:latin typeface="Aptos Display" panose="02110004020202020204"/>
+        <a:ea typeface=""/>
+        <a:cs typeface=""/>
+        <a:font script="Jpan" typeface="游ゴシック Light"/>
+        <a:font script="Hang" typeface="맑은 고딕"/>
+        <a:font script="Hans" typeface="等线 Light"/>
+        <a:font script="Hant" typeface="新細明體"/>
+        <a:font script="Arab" typeface="Times New Roman"/>
+        <a:font script="Hebr" typeface="Times New Roman"/>
+        <a:font script="Thai" typeface="Angsana New"/>
+        <a:font script="Ethi" typeface="Nyala"/>
+        <a:font script="Beng" typeface="Vrinda"/>
+        <a:font script="Gujr" typeface="Shruti"/>
+        <a:font script="Khmr" typeface="MoolBoran"/>
+        <a:font script="Knda" typeface="Tunga"/>
+        <a:font script="Guru" typeface="Raavi"/>
+        <a:font script="Cans" typeface="Euphemia"/>
+        <a:font script="Cher" typeface="Plantagenet Cherokee"/>
+        <a:font script="Yiii" typeface="Microsoft Yi Baiti"/>
+        <a:font script="Tibt" typeface="Microsoft Himalaya"/>
+        <a:font script="Thaa" typeface="MV Boli"/>
+        <a:font script="Deva" typeface="Mangal"/>
+        <a:font script="Telu" typeface="Gautami"/>
+        <a:font script="Taml" typeface="Latha"/>
+        <a:font script="Syrc" typeface="Estrangelo Edessa"/>
+        <a:font script="Orya" typeface="Kalinga"/>
+        <a:font script="Mlym" typeface="Kartika"/>
+        <a:font script="Laoo" typeface="DokChampa"/>
+        <a:font script="Sinh" typeface="Iskoola Pota"/>
+        <a:font script="Mong" typeface="Mongolian Baiti"/>
+        <a:font script="Viet" typeface="Times New Roman"/>
+        <a:font script="Uigh" typeface="Microsoft Uighur"/>
+        <a:font script="Geor" typeface="Sylfaen"/>
+        <a:font script="Armn" typeface="Arial"/>
+        <a:font script="Bugi" typeface="Leelawadee UI"/>
+        <a:font script="Bopo" typeface="Microsoft JhengHei"/>
+        <a:font script="Java" typeface="Javanese Text"/>
+        <a:font script="Lisu" typeface="Segoe UI"/>
+        <a:font script="Mymr" typeface="Myanmar Text"/>
+        <a:font script="Nkoo" typeface="Ebrima"/>
+        <a:font script="Olck" typeface="Nirmala UI"/>
+        <a:font script="Osma" typeface="Ebrima"/>
+        <a:font script="Phag" typeface="Phagspa"/>
+        <a:font script="Syrn" typeface="Estrangelo Edessa"/>
+        <a:font script="Syrj" typeface="Estrangelo Edessa"/>
+        <a:font script="Syre" typeface="Estrangelo Edessa"/>
+        <a:font script="Sora" typeface="Nirmala UI"/>
+        <a:font script="Tale" typeface="Microsoft Tai Le"/>
+        <a:font script="Talu" typeface="Microsoft New Tai Lue"/>
+        <a:font script="Tfng" typeface="Ebrima"/>
+      </a:majorFont>
+      <a:minorFont>
+        <a:latin typeface="Aptos" panose="02110004020202020204"/>
+        <a:ea typeface=""/>
+        <a:cs typeface=""/>
+        <a:font script="Jpan" typeface="游ゴシック"/>
+        <a:font script="Hang" typeface="맑은 고딕"/>
+        <a:font script="Hans" typeface="等线"/>
+        <a:font script="Hant" typeface="新細明體"/>
+        <a:font script="Arab" typeface="Arial"/>
+        <a:font script="Hebr" typeface="Arial"/>
+        <a:font script="Thai" typeface="Cordia New"/>
+        <a:font script="Ethi" typeface="Nyala"/>
+        <a:font script="Beng" typeface="Vrinda"/>
+        <a:font script="Gujr" typeface="Shruti"/>
+        <a:font script="Khmr" typeface="DaunPenh"/>
+        <a:font script="Knda" typeface="Tunga"/>
+        <a:font script="Guru" typeface="Raavi"/>
+        <a:font script="Cans" typeface="Euphemia"/>
+        <a:font script="Cher" typeface="Plantagenet Cherokee"/>
+        <a:font script="Yiii" typeface="Microsoft Yi Baiti"/>
+        <a:font script="Tibt" typeface="Microsoft Himalaya"/>
+        <a:font script="Thaa" typeface="MV Boli"/>
+        <a:font script="Deva" typeface="Mangal"/>
+        <a:font script="Telu" typeface="Gautami"/>
+        <a:font script="Taml" typeface="Latha"/>
+        <a:font script="Syrc" typeface="Estrangelo Edessa"/>
+        <a:font script="Orya" typeface="Kalinga"/>
+        <a:font script="Mlym" typeface="Kartika"/>
+        <a:font script="Laoo" typeface="DokChampa"/>
+        <a:font script="Sinh" typeface="Iskoola Pota"/>
+        <a:font script="Mong" typeface="Mongolian Baiti"/>
+        <a:font script="Viet" typeface="Arial"/>
+        <a:font script="Uigh" typeface="Microsoft Uighur"/>
+        <a:font script="Geor" typeface="Sylfaen"/>
+        <a:font script="Armn" typeface="Arial"/>
+        <a:font script="Bugi" typeface="Leelawadee UI"/>
+        <a:font script="Bopo" typeface="Microsoft JhengHei"/>
+        <a:font script="Java" typeface="Javanese Text"/>
+        <a:font script="Lisu" typeface="Segoe UI"/>
+        <a:font script="Mymr" typeface="Myanmar Text"/>
+        <a:font script="Nkoo" typeface="Ebrima"/>
+        <a:font script="Olck" typeface="Nirmala UI"/>
+        <a:font script="Osma" typeface="Ebrima"/>
+        <a:font script="Phag" typeface="Phagspa"/>
+        <a:font script="Syrn" typeface="Estrangelo Edessa"/>
+        <a:font script="Syrj" typeface="Estrangelo Edessa"/>
+        <a:font script="Syre" typeface="Estrangelo Edessa"/>
+        <a:font script="Sora" typeface="Nirmala UI"/>
+        <a:font script="Tale" typeface="Microsoft Tai Le"/>
+        <a:font script="Talu" typeface="Microsoft New Tai Lue"/>
+        <a:font script="Tfng" typeface="Ebrima"/>
+      </a:minorFont>
+    </a:fontScheme>
+    <a:fmtScheme name="Office">
+      <a:fillStyleLst>
+        <a:solidFill>
+          <a:schemeClr val="phClr"/>
+        </a:solidFill>
+        <a:gradFill rotWithShape="1">
+          <a:gsLst>
+            <a:gs pos="0">
+              <a:schemeClr val="phClr">
+                <a:lumMod val="110000"/>
+                <a:satMod val="105000"/>
+                <a:tint val="67000"/>
+              </a:schemeClr>
+            </a:gs>
+            <a:gs pos="50000">
+              <a:schemeClr val="phClr">
+                <a:lumMod val="105000"/>
+                <a:satMod val="103000"/>
+                <a:tint val="73000"/>
+              </a:schemeClr>
+            </a:gs>
+            <a:gs pos="100000">
+              <a:schemeClr val="phClr">
+                <a:lumMod val="105000"/>
+                <a:satMod val="109000"/>
+                <a:tint val="81000"/>
+              </a:schemeClr>
+            </a:gs>
+          </a:gsLst>
+          <a:lin ang="5400000" scaled="0"/>
+        </a:gradFill>
+        <a:gradFill rotWithShape="1">
+          <a:gsLst>
+            <a:gs pos="0">
+              <a:schemeClr val="phClr">
+                <a:satMod val="103000"/>
+                <a:lumMod val="102000"/>
+                <a:tint val="94000"/>
+              </a:schemeClr>
+            </a:gs>
+            <a:gs pos="50000">
+              <a:schemeClr val="phClr">
+                <a:satMod val="110000"/>
+                <a:lumMod val="100000"/>
+                <a:shade val="100000"/>
+              </a:schemeClr>
+            </a:gs>
+            <a:gs pos="100000">
+              <a:schemeClr val="phClr">
+                <a:lumMod val="99000"/>
+                <a:satMod val="120000"/>
+                <a:shade val="78000"/>
+              </a:schemeClr>
+            </a:gs>
+          </a:gsLst>
+          <a:lin ang="5400000" scaled="0"/>
+        </a:gradFill>
+      </a:fillStyleLst>
+      <a:lnStyleLst>
+        <a:ln w="12700" cap="flat" cmpd="sng" algn="ctr">
+          <a:solidFill>
+            <a:schemeClr val="phClr"/>
+          </a:solidFill>
+          <a:prstDash val="solid"/>
+          <a:miter lim="800000"/>
+        </a:ln>
+        <a:ln w="19050" cap="flat" cmpd="sng" algn="ctr">
+          <a:solidFill>
+            <a:schemeClr val="phClr"/>
+          </a:solidFill>
+          <a:prstDash val="solid"/>
+          <a:miter lim="800000"/>
+        </a:ln>
+        <a:ln w="25400" cap="flat" cmpd="sng" algn="ctr">
+          <a:solidFill>
+            <a:schemeClr val="phClr"/>
+          </a:solidFill>
+          <a:prstDash val="solid"/>
+          <a:miter lim="800000"/>
+        </a:ln>
+      </a:lnStyleLst>
+      <a:effectStyleLst>
+        <a:effectStyle>
+          <a:effectLst/>
+        </a:effectStyle>
+        <a:effectStyle>
+          <a:effectLst/>
+        </a:effectStyle>
+        <a:effectStyle>
+          <a:effectLst>
+            <a:outerShdw blurRad="57150" dist="19050" dir="5400000" algn="ctr" rotWithShape="0">
+              <a:srgbClr val="000000">
+                <a:alpha val="63000"/>
+              </a:srgbClr>
+            </a:outerShdw>
+          </a:effectLst>
+        </a:effectStyle>
+      </a:effectStyleLst>
+      <a:bgFillStyleLst>
+        <a:solidFill>
+          <a:schemeClr val="phClr"/>
+        </a:solidFill>
+        <a:solidFill>
+          <a:schemeClr val="phClr">
+            <a:tint val="95000"/>
+            <a:satMod val="170000"/>
+          </a:schemeClr>
+        </a:solidFill>
+        <a:gradFill rotWithShape="1">
+          <a:gsLst>
+            <a:gs pos="0">
+              <a:schemeClr val="phClr">
+                <a:tint val="93000"/>
+                <a:satMod val="150000"/>
+                <a:shade val="98000"/>
+                <a:lumMod val="102000"/>
+              </a:schemeClr>
+            </a:gs>
+            <a:gs pos="50000">
+              <a:schemeClr val="phClr">
+                <a:tint val="98000"/>
+                <a:satMod val="130000"/>
+                <a:shade val="90000"/>
+                <a:lumMod val="103000"/>
+              </a:schemeClr>
+            </a:gs>
+            <a:gs pos="100000">
+              <a:schemeClr val="phClr">
+                <a:shade val="63000"/>
+                <a:satMod val="120000"/>
+              </a:schemeClr>
+            </a:gs>
+          </a:gsLst>
+          <a:lin ang="5400000" scaled="0"/>
+        </a:gradFill>
+      </a:bgFillStyleLst>
+    </a:fmtScheme>
+  </a:themeElements>
+  <a:objectDefaults>
+    <a:lnDef>
+      <a:spPr/>
+      <a:bodyPr/>
+      <a:lstStyle/>
+      <a:style>
+        <a:lnRef idx="2">
+          <a:schemeClr val="accent1"/>
+        </a:lnRef>
+        <a:fillRef idx="0">
+          <a:schemeClr val="accent1"/>
+        </a:fillRef>
+        <a:effectRef idx="1">
+          <a:schemeClr val="accent1"/>
+        </a:effectRef>
+        <a:fontRef idx="minor">
+          <a:schemeClr val="tx1"/>
+        </a:fontRef>
+      </a:style>
+    </a:lnDef>
+  </a:objectDefaults>
+  <a:extraClrSchemeLst/>
+  <a:extLst>
+    <a:ext uri="{05A4C25C-085E-4340-85A3-A5531E510DB2}">
+      <thm15:themeFamily xmlns:thm15="http://schemas.microsoft.com/office/thememl/2012/main" name="Office Theme" id="{2E142A2C-CD16-42D6-873A-C26D2A0506FA}" vid="{1BDDFF52-6CD6-40A5-AB3C-68EB2F1E4D0A}"/>
+    </a:ext>
+  </a:extLst>
+</a:theme>
 </file>